--- a/Writing/Submission/DOC files/table_of_contents.pptx
+++ b/Writing/Submission/DOC files/table_of_contents.pptx
@@ -3420,420 +3420,12 @@
           <a:chExt cx="0" cy="0"/>
         </a:xfrm>
       </p:grpSpPr>
-      <p:sp>
-        <p:nvSpPr>
-          <p:cNvPr id="3" name="TextBox 2">
+      <p:grpSp>
+        <p:nvGrpSpPr>
+          <p:cNvPr id="2" name="Group 1">
             <a:extLst>
               <a:ext uri="{FF2B5EF4-FFF2-40B4-BE49-F238E27FC236}">
-                <a16:creationId xmlns:a16="http://schemas.microsoft.com/office/drawing/2014/main" id="{68423097-AD09-EF4D-E5E9-D7F061AD728D}"/>
-              </a:ext>
-            </a:extLst>
-          </p:cNvPr>
-          <p:cNvSpPr txBox="1"/>
-          <p:nvPr/>
-        </p:nvSpPr>
-        <p:spPr>
-          <a:xfrm>
-            <a:off x="2062342" y="148916"/>
-            <a:ext cx="805339" cy="276999"/>
-          </a:xfrm>
-          <a:prstGeom prst="rect">
-            <a:avLst/>
-          </a:prstGeom>
-          <a:noFill/>
-        </p:spPr>
-        <p:txBody>
-          <a:bodyPr wrap="square">
-            <a:spAutoFit/>
-          </a:bodyPr>
-          <a:lstStyle/>
-          <a:p>
-            <a:r>
-              <a:rPr lang="en-US" sz="1200" dirty="0">
-                <a:latin typeface="Arial" panose="020B0604020202020204" pitchFamily="34" charset="0"/>
-                <a:cs typeface="Arial" panose="020B0604020202020204" pitchFamily="34" charset="0"/>
-              </a:rPr>
-              <a:t>−90%</a:t>
-            </a:r>
-            <a:endParaRPr lang="en-US" sz="1200" dirty="0"/>
-          </a:p>
-        </p:txBody>
-      </p:sp>
-      <p:sp>
-        <p:nvSpPr>
-          <p:cNvPr id="8" name="TextBox 7">
-            <a:extLst>
-              <a:ext uri="{FF2B5EF4-FFF2-40B4-BE49-F238E27FC236}">
-                <a16:creationId xmlns:a16="http://schemas.microsoft.com/office/drawing/2014/main" id="{5369BDC3-1371-A8B7-8C72-C3B927D924CF}"/>
-              </a:ext>
-            </a:extLst>
-          </p:cNvPr>
-          <p:cNvSpPr txBox="1"/>
-          <p:nvPr/>
-        </p:nvSpPr>
-        <p:spPr>
-          <a:xfrm>
-            <a:off x="2061050" y="532029"/>
-            <a:ext cx="805339" cy="276999"/>
-          </a:xfrm>
-          <a:prstGeom prst="rect">
-            <a:avLst/>
-          </a:prstGeom>
-          <a:noFill/>
-        </p:spPr>
-        <p:txBody>
-          <a:bodyPr wrap="square">
-            <a:spAutoFit/>
-          </a:bodyPr>
-          <a:lstStyle/>
-          <a:p>
-            <a:r>
-              <a:rPr lang="en-US" sz="1200" dirty="0">
-                <a:latin typeface="Arial" panose="020B0604020202020204" pitchFamily="34" charset="0"/>
-                <a:cs typeface="Arial" panose="020B0604020202020204" pitchFamily="34" charset="0"/>
-              </a:rPr>
-              <a:t>−10%</a:t>
-            </a:r>
-            <a:endParaRPr lang="en-US" sz="1200" dirty="0"/>
-          </a:p>
-        </p:txBody>
-      </p:sp>
-      <p:cxnSp>
-        <p:nvCxnSpPr>
-          <p:cNvPr id="22" name="Straight Arrow Connector 21">
-            <a:extLst>
-              <a:ext uri="{FF2B5EF4-FFF2-40B4-BE49-F238E27FC236}">
-                <a16:creationId xmlns:a16="http://schemas.microsoft.com/office/drawing/2014/main" id="{FE183C5C-E470-8B03-4603-B8CBF71ED483}"/>
-              </a:ext>
-            </a:extLst>
-          </p:cNvPr>
-          <p:cNvCxnSpPr>
-            <a:cxnSpLocks/>
-          </p:cNvCxnSpPr>
-          <p:nvPr/>
-        </p:nvCxnSpPr>
-        <p:spPr>
-          <a:xfrm>
-            <a:off x="93345" y="280056"/>
-            <a:ext cx="1992630" cy="0"/>
-          </a:xfrm>
-          <a:prstGeom prst="straightConnector1">
-            <a:avLst/>
-          </a:prstGeom>
-          <a:ln cap="rnd">
-            <a:solidFill>
-              <a:schemeClr val="accent6">
-                <a:lumMod val="20000"/>
-                <a:lumOff val="80000"/>
-              </a:schemeClr>
-            </a:solidFill>
-            <a:tailEnd type="triangle"/>
-          </a:ln>
-        </p:spPr>
-        <p:style>
-          <a:lnRef idx="2">
-            <a:schemeClr val="accent1"/>
-          </a:lnRef>
-          <a:fillRef idx="0">
-            <a:schemeClr val="accent1"/>
-          </a:fillRef>
-          <a:effectRef idx="1">
-            <a:schemeClr val="accent1"/>
-          </a:effectRef>
-          <a:fontRef idx="minor">
-            <a:schemeClr val="tx1"/>
-          </a:fontRef>
-        </p:style>
-      </p:cxnSp>
-      <p:sp>
-        <p:nvSpPr>
-          <p:cNvPr id="10" name="TextBox 9">
-            <a:extLst>
-              <a:ext uri="{FF2B5EF4-FFF2-40B4-BE49-F238E27FC236}">
-                <a16:creationId xmlns:a16="http://schemas.microsoft.com/office/drawing/2014/main" id="{533644A2-A98F-753D-7D45-B5ADF23DBFB0}"/>
-              </a:ext>
-            </a:extLst>
-          </p:cNvPr>
-          <p:cNvSpPr txBox="1"/>
-          <p:nvPr/>
-        </p:nvSpPr>
-        <p:spPr>
-          <a:xfrm>
-            <a:off x="-24764" y="350873"/>
-            <a:ext cx="2171699" cy="369332"/>
-          </a:xfrm>
-          <a:prstGeom prst="rect">
-            <a:avLst/>
-          </a:prstGeom>
-          <a:noFill/>
-        </p:spPr>
-        <p:txBody>
-          <a:bodyPr wrap="square" rtlCol="0">
-            <a:spAutoFit/>
-          </a:bodyPr>
-          <a:lstStyle/>
-          <a:p>
-            <a:r>
-              <a:rPr lang="en-US" spc="400" dirty="0">
-                <a:solidFill>
-                  <a:schemeClr val="tx1">
-                    <a:lumMod val="50000"/>
-                    <a:lumOff val="50000"/>
-                  </a:schemeClr>
-                </a:solidFill>
-                <a:latin typeface="Arial" panose="020B0604020202020204" pitchFamily="34" charset="0"/>
-                <a:cs typeface="Arial" panose="020B0604020202020204" pitchFamily="34" charset="0"/>
-              </a:rPr>
-              <a:t>Fos</a:t>
-            </a:r>
-            <a:r>
-              <a:rPr lang="en-US" spc="400" dirty="0">
-                <a:solidFill>
-                  <a:schemeClr val="bg1">
-                    <a:lumMod val="50000"/>
-                  </a:schemeClr>
-                </a:solidFill>
-                <a:latin typeface="Arial" panose="020B0604020202020204" pitchFamily="34" charset="0"/>
-                <a:cs typeface="Arial" panose="020B0604020202020204" pitchFamily="34" charset="0"/>
-              </a:rPr>
-              <a:t>sil</a:t>
-            </a:r>
-            <a:r>
-              <a:rPr lang="en-US" spc="400" dirty="0">
-                <a:solidFill>
-                  <a:schemeClr val="accent6">
-                    <a:lumMod val="20000"/>
-                    <a:lumOff val="80000"/>
-                  </a:schemeClr>
-                </a:solidFill>
-                <a:latin typeface="Arial" panose="020B0604020202020204" pitchFamily="34" charset="0"/>
-                <a:cs typeface="Arial" panose="020B0604020202020204" pitchFamily="34" charset="0"/>
-              </a:rPr>
-              <a:t> </a:t>
-            </a:r>
-            <a:r>
-              <a:rPr lang="en-US" spc="400" dirty="0">
-                <a:solidFill>
-                  <a:schemeClr val="bg1">
-                    <a:lumMod val="65000"/>
-                  </a:schemeClr>
-                </a:solidFill>
-                <a:latin typeface="Arial" panose="020B0604020202020204" pitchFamily="34" charset="0"/>
-                <a:cs typeface="Arial" panose="020B0604020202020204" pitchFamily="34" charset="0"/>
-              </a:rPr>
-              <a:t>rou</a:t>
-            </a:r>
-            <a:r>
-              <a:rPr lang="en-US" spc="400" dirty="0">
-                <a:solidFill>
-                  <a:schemeClr val="bg1">
-                    <a:lumMod val="75000"/>
-                  </a:schemeClr>
-                </a:solidFill>
-                <a:latin typeface="Arial" panose="020B0604020202020204" pitchFamily="34" charset="0"/>
-                <a:cs typeface="Arial" panose="020B0604020202020204" pitchFamily="34" charset="0"/>
-              </a:rPr>
-              <a:t>tes</a:t>
-            </a:r>
-            <a:endParaRPr lang="en-US" sz="900" baseline="-25000" dirty="0">
-              <a:solidFill>
-                <a:schemeClr val="bg1">
-                  <a:lumMod val="75000"/>
-                </a:schemeClr>
-              </a:solidFill>
-              <a:latin typeface="Arial" panose="020B0604020202020204" pitchFamily="34" charset="0"/>
-              <a:cs typeface="Arial" panose="020B0604020202020204" pitchFamily="34" charset="0"/>
-            </a:endParaRPr>
-          </a:p>
-        </p:txBody>
-      </p:sp>
-      <p:sp>
-        <p:nvSpPr>
-          <p:cNvPr id="4" name="TextBox 3">
-            <a:extLst>
-              <a:ext uri="{FF2B5EF4-FFF2-40B4-BE49-F238E27FC236}">
-                <a16:creationId xmlns:a16="http://schemas.microsoft.com/office/drawing/2014/main" id="{9CC25F9F-D5DC-903C-0214-23FB9DF62F58}"/>
-              </a:ext>
-            </a:extLst>
-          </p:cNvPr>
-          <p:cNvSpPr txBox="1"/>
-          <p:nvPr/>
-        </p:nvSpPr>
-        <p:spPr>
-          <a:xfrm>
-            <a:off x="-24764" y="-30340"/>
-            <a:ext cx="2171699" cy="369332"/>
-          </a:xfrm>
-          <a:prstGeom prst="rect">
-            <a:avLst/>
-          </a:prstGeom>
-          <a:noFill/>
-        </p:spPr>
-        <p:txBody>
-          <a:bodyPr wrap="square" rtlCol="0">
-            <a:spAutoFit/>
-          </a:bodyPr>
-          <a:lstStyle/>
-          <a:p>
-            <a:r>
-              <a:rPr lang="en-US" spc="400" dirty="0">
-                <a:solidFill>
-                  <a:schemeClr val="accent6">
-                    <a:lumMod val="20000"/>
-                    <a:lumOff val="80000"/>
-                  </a:schemeClr>
-                </a:solidFill>
-                <a:latin typeface="Arial" panose="020B0604020202020204" pitchFamily="34" charset="0"/>
-                <a:cs typeface="Arial" panose="020B0604020202020204" pitchFamily="34" charset="0"/>
-              </a:rPr>
-              <a:t>G</a:t>
-            </a:r>
-            <a:r>
-              <a:rPr lang="en-US" spc="400" dirty="0">
-                <a:solidFill>
-                  <a:srgbClr val="CAEDBD"/>
-                </a:solidFill>
-                <a:latin typeface="Arial" panose="020B0604020202020204" pitchFamily="34" charset="0"/>
-                <a:cs typeface="Arial" panose="020B0604020202020204" pitchFamily="34" charset="0"/>
-              </a:rPr>
-              <a:t>r</a:t>
-            </a:r>
-            <a:r>
-              <a:rPr lang="en-US" spc="400" dirty="0">
-                <a:solidFill>
-                  <a:srgbClr val="C5EBB7"/>
-                </a:solidFill>
-                <a:latin typeface="Arial" panose="020B0604020202020204" pitchFamily="34" charset="0"/>
-                <a:cs typeface="Arial" panose="020B0604020202020204" pitchFamily="34" charset="0"/>
-              </a:rPr>
-              <a:t>e</a:t>
-            </a:r>
-            <a:r>
-              <a:rPr lang="en-US" spc="400" dirty="0">
-                <a:solidFill>
-                  <a:srgbClr val="BAE8AA"/>
-                </a:solidFill>
-                <a:latin typeface="Arial" panose="020B0604020202020204" pitchFamily="34" charset="0"/>
-                <a:cs typeface="Arial" panose="020B0604020202020204" pitchFamily="34" charset="0"/>
-              </a:rPr>
-              <a:t>e</a:t>
-            </a:r>
-            <a:r>
-              <a:rPr lang="en-US" spc="400" dirty="0">
-                <a:solidFill>
-                  <a:srgbClr val="AAE296"/>
-                </a:solidFill>
-                <a:latin typeface="Arial" panose="020B0604020202020204" pitchFamily="34" charset="0"/>
-                <a:cs typeface="Arial" panose="020B0604020202020204" pitchFamily="34" charset="0"/>
-              </a:rPr>
-              <a:t>n</a:t>
-            </a:r>
-            <a:r>
-              <a:rPr lang="en-US" spc="400" dirty="0">
-                <a:solidFill>
-                  <a:schemeClr val="accent6">
-                    <a:lumMod val="20000"/>
-                    <a:lumOff val="80000"/>
-                  </a:schemeClr>
-                </a:solidFill>
-                <a:latin typeface="Arial" panose="020B0604020202020204" pitchFamily="34" charset="0"/>
-                <a:cs typeface="Arial" panose="020B0604020202020204" pitchFamily="34" charset="0"/>
-              </a:rPr>
-              <a:t> </a:t>
-            </a:r>
-            <a:r>
-              <a:rPr lang="en-US" spc="400" dirty="0">
-                <a:solidFill>
-                  <a:srgbClr val="7DD35F"/>
-                </a:solidFill>
-                <a:latin typeface="Arial" panose="020B0604020202020204" pitchFamily="34" charset="0"/>
-                <a:cs typeface="Arial" panose="020B0604020202020204" pitchFamily="34" charset="0"/>
-              </a:rPr>
-              <a:t>r</a:t>
-            </a:r>
-            <a:r>
-              <a:rPr lang="en-US" spc="400" dirty="0">
-                <a:solidFill>
-                  <a:srgbClr val="68CC44"/>
-                </a:solidFill>
-                <a:latin typeface="Arial" panose="020B0604020202020204" pitchFamily="34" charset="0"/>
-                <a:cs typeface="Arial" panose="020B0604020202020204" pitchFamily="34" charset="0"/>
-              </a:rPr>
-              <a:t>o</a:t>
-            </a:r>
-            <a:r>
-              <a:rPr lang="en-US" spc="400" dirty="0">
-                <a:solidFill>
-                  <a:srgbClr val="57BB33"/>
-                </a:solidFill>
-                <a:latin typeface="Arial" panose="020B0604020202020204" pitchFamily="34" charset="0"/>
-                <a:cs typeface="Arial" panose="020B0604020202020204" pitchFamily="34" charset="0"/>
-              </a:rPr>
-              <a:t>u</a:t>
-            </a:r>
-            <a:r>
-              <a:rPr lang="en-US" spc="400" dirty="0">
-                <a:solidFill>
-                  <a:srgbClr val="52A535"/>
-                </a:solidFill>
-                <a:latin typeface="Arial" panose="020B0604020202020204" pitchFamily="34" charset="0"/>
-                <a:cs typeface="Arial" panose="020B0604020202020204" pitchFamily="34" charset="0"/>
-              </a:rPr>
-              <a:t>t</a:t>
-            </a:r>
-            <a:r>
-              <a:rPr lang="en-US" spc="400" dirty="0">
-                <a:solidFill>
-                  <a:srgbClr val="41822A"/>
-                </a:solidFill>
-                <a:latin typeface="Arial" panose="020B0604020202020204" pitchFamily="34" charset="0"/>
-                <a:cs typeface="Arial" panose="020B0604020202020204" pitchFamily="34" charset="0"/>
-              </a:rPr>
-              <a:t>e</a:t>
-            </a:r>
-            <a:r>
-              <a:rPr lang="en-US" spc="400" dirty="0">
-                <a:solidFill>
-                  <a:srgbClr val="316220"/>
-                </a:solidFill>
-                <a:latin typeface="Arial" panose="020B0604020202020204" pitchFamily="34" charset="0"/>
-                <a:cs typeface="Arial" panose="020B0604020202020204" pitchFamily="34" charset="0"/>
-              </a:rPr>
-              <a:t>s</a:t>
-            </a:r>
-            <a:r>
-              <a:rPr lang="en-US" sz="1100" dirty="0">
-                <a:solidFill>
-                  <a:schemeClr val="bg1"/>
-                </a:solidFill>
-                <a:latin typeface="Arial" panose="020B0604020202020204" pitchFamily="34" charset="0"/>
-                <a:cs typeface="Arial" panose="020B0604020202020204" pitchFamily="34" charset="0"/>
-              </a:rPr>
-              <a:t>    </a:t>
-            </a:r>
-            <a:r>
-              <a:rPr lang="en-US" dirty="0">
-                <a:solidFill>
-                  <a:schemeClr val="bg1"/>
-                </a:solidFill>
-                <a:latin typeface="Arial" panose="020B0604020202020204" pitchFamily="34" charset="0"/>
-                <a:cs typeface="Arial" panose="020B0604020202020204" pitchFamily="34" charset="0"/>
-              </a:rPr>
-              <a:t>        </a:t>
-            </a:r>
-            <a:endParaRPr lang="en-US" baseline="-25000" dirty="0">
-              <a:latin typeface="Arial" panose="020B0604020202020204" pitchFamily="34" charset="0"/>
-              <a:cs typeface="Arial" panose="020B0604020202020204" pitchFamily="34" charset="0"/>
-            </a:endParaRPr>
-          </a:p>
-        </p:txBody>
-      </p:sp>
-      <p:grpSp>
-        <p:nvGrpSpPr>
-          <p:cNvPr id="28" name="Group 27">
-            <a:extLst>
-              <a:ext uri="{FF2B5EF4-FFF2-40B4-BE49-F238E27FC236}">
-                <a16:creationId xmlns:a16="http://schemas.microsoft.com/office/drawing/2014/main" id="{E94C6D85-5F98-CC54-B529-E3ED0EF7E958}"/>
+                <a16:creationId xmlns:a16="http://schemas.microsoft.com/office/drawing/2014/main" id="{8A78AC22-8AE3-4E0C-AE16-8E41A0C32807}"/>
               </a:ext>
             </a:extLst>
           </p:cNvPr>
@@ -3842,263 +3434,18 @@
         </p:nvGrpSpPr>
         <p:grpSpPr>
           <a:xfrm>
-            <a:off x="2539760" y="548934"/>
-            <a:ext cx="352982" cy="203183"/>
-            <a:chOff x="406515" y="1223271"/>
-            <a:chExt cx="1179854" cy="679146"/>
+            <a:off x="-24764" y="-30340"/>
+            <a:ext cx="2917506" cy="1488657"/>
+            <a:chOff x="-24764" y="-30340"/>
+            <a:chExt cx="2917506" cy="1488657"/>
           </a:xfrm>
         </p:grpSpPr>
         <p:sp>
           <p:nvSpPr>
-            <p:cNvPr id="29" name="Freeform 39">
+            <p:cNvPr id="3" name="TextBox 2">
               <a:extLst>
                 <a:ext uri="{FF2B5EF4-FFF2-40B4-BE49-F238E27FC236}">
-                  <a16:creationId xmlns:a16="http://schemas.microsoft.com/office/drawing/2014/main" id="{5050812F-EDBA-FB88-3649-A4DCC2509FF1}"/>
-                </a:ext>
-              </a:extLst>
-            </p:cNvPr>
-            <p:cNvSpPr/>
-            <p:nvPr/>
-          </p:nvSpPr>
-          <p:spPr>
-            <a:xfrm>
-              <a:off x="561409" y="1223271"/>
-              <a:ext cx="801038" cy="570598"/>
-            </a:xfrm>
-            <a:custGeom>
-              <a:avLst/>
-              <a:gdLst>
-                <a:gd name="connsiteX0" fmla="*/ 484955 w 801038"/>
-                <a:gd name="connsiteY0" fmla="*/ 0 h 570598"/>
-                <a:gd name="connsiteX1" fmla="*/ 719139 w 801038"/>
-                <a:gd name="connsiteY1" fmla="*/ 234184 h 570598"/>
-                <a:gd name="connsiteX2" fmla="*/ 713016 w 801038"/>
-                <a:gd name="connsiteY2" fmla="*/ 264512 h 570598"/>
-                <a:gd name="connsiteX3" fmla="*/ 750011 w 801038"/>
-                <a:gd name="connsiteY3" fmla="*/ 288196 h 570598"/>
-                <a:gd name="connsiteX4" fmla="*/ 801038 w 801038"/>
-                <a:gd name="connsiteY4" fmla="*/ 405171 h 570598"/>
-                <a:gd name="connsiteX5" fmla="*/ 694635 w 801038"/>
-                <a:gd name="connsiteY5" fmla="*/ 557598 h 570598"/>
-                <a:gd name="connsiteX6" fmla="*/ 632231 w 801038"/>
-                <a:gd name="connsiteY6" fmla="*/ 569561 h 570598"/>
-                <a:gd name="connsiteX7" fmla="*/ 632231 w 801038"/>
-                <a:gd name="connsiteY7" fmla="*/ 569790 h 570598"/>
-                <a:gd name="connsiteX8" fmla="*/ 631037 w 801038"/>
-                <a:gd name="connsiteY8" fmla="*/ 569790 h 570598"/>
-                <a:gd name="connsiteX9" fmla="*/ 626822 w 801038"/>
-                <a:gd name="connsiteY9" fmla="*/ 570598 h 570598"/>
-                <a:gd name="connsiteX10" fmla="*/ 622607 w 801038"/>
-                <a:gd name="connsiteY10" fmla="*/ 569790 h 570598"/>
-                <a:gd name="connsiteX11" fmla="*/ 178431 w 801038"/>
-                <a:gd name="connsiteY11" fmla="*/ 569790 h 570598"/>
-                <a:gd name="connsiteX12" fmla="*/ 174216 w 801038"/>
-                <a:gd name="connsiteY12" fmla="*/ 570598 h 570598"/>
-                <a:gd name="connsiteX13" fmla="*/ 0 w 801038"/>
-                <a:gd name="connsiteY13" fmla="*/ 405171 h 570598"/>
-                <a:gd name="connsiteX14" fmla="*/ 106403 w 801038"/>
-                <a:gd name="connsiteY14" fmla="*/ 252744 h 570598"/>
-                <a:gd name="connsiteX15" fmla="*/ 113189 w 801038"/>
-                <a:gd name="connsiteY15" fmla="*/ 251443 h 570598"/>
-                <a:gd name="connsiteX16" fmla="*/ 114047 w 801038"/>
-                <a:gd name="connsiteY16" fmla="*/ 247193 h 570598"/>
-                <a:gd name="connsiteX17" fmla="*/ 238811 w 801038"/>
-                <a:gd name="connsiteY17" fmla="*/ 164494 h 570598"/>
-                <a:gd name="connsiteX18" fmla="*/ 261449 w 801038"/>
-                <a:gd name="connsiteY18" fmla="*/ 167916 h 570598"/>
-                <a:gd name="connsiteX19" fmla="*/ 269174 w 801038"/>
-                <a:gd name="connsiteY19" fmla="*/ 143029 h 570598"/>
-                <a:gd name="connsiteX20" fmla="*/ 484955 w 801038"/>
-                <a:gd name="connsiteY20" fmla="*/ 0 h 570598"/>
-              </a:gdLst>
-              <a:ahLst/>
-              <a:cxnLst>
-                <a:cxn ang="0">
-                  <a:pos x="connsiteX0" y="connsiteY0"/>
-                </a:cxn>
-                <a:cxn ang="0">
-                  <a:pos x="connsiteX1" y="connsiteY1"/>
-                </a:cxn>
-                <a:cxn ang="0">
-                  <a:pos x="connsiteX2" y="connsiteY2"/>
-                </a:cxn>
-                <a:cxn ang="0">
-                  <a:pos x="connsiteX3" y="connsiteY3"/>
-                </a:cxn>
-                <a:cxn ang="0">
-                  <a:pos x="connsiteX4" y="connsiteY4"/>
-                </a:cxn>
-                <a:cxn ang="0">
-                  <a:pos x="connsiteX5" y="connsiteY5"/>
-                </a:cxn>
-                <a:cxn ang="0">
-                  <a:pos x="connsiteX6" y="connsiteY6"/>
-                </a:cxn>
-                <a:cxn ang="0">
-                  <a:pos x="connsiteX7" y="connsiteY7"/>
-                </a:cxn>
-                <a:cxn ang="0">
-                  <a:pos x="connsiteX8" y="connsiteY8"/>
-                </a:cxn>
-                <a:cxn ang="0">
-                  <a:pos x="connsiteX9" y="connsiteY9"/>
-                </a:cxn>
-                <a:cxn ang="0">
-                  <a:pos x="connsiteX10" y="connsiteY10"/>
-                </a:cxn>
-                <a:cxn ang="0">
-                  <a:pos x="connsiteX11" y="connsiteY11"/>
-                </a:cxn>
-                <a:cxn ang="0">
-                  <a:pos x="connsiteX12" y="connsiteY12"/>
-                </a:cxn>
-                <a:cxn ang="0">
-                  <a:pos x="connsiteX13" y="connsiteY13"/>
-                </a:cxn>
-                <a:cxn ang="0">
-                  <a:pos x="connsiteX14" y="connsiteY14"/>
-                </a:cxn>
-                <a:cxn ang="0">
-                  <a:pos x="connsiteX15" y="connsiteY15"/>
-                </a:cxn>
-                <a:cxn ang="0">
-                  <a:pos x="connsiteX16" y="connsiteY16"/>
-                </a:cxn>
-                <a:cxn ang="0">
-                  <a:pos x="connsiteX17" y="connsiteY17"/>
-                </a:cxn>
-                <a:cxn ang="0">
-                  <a:pos x="connsiteX18" y="connsiteY18"/>
-                </a:cxn>
-                <a:cxn ang="0">
-                  <a:pos x="connsiteX19" y="connsiteY19"/>
-                </a:cxn>
-                <a:cxn ang="0">
-                  <a:pos x="connsiteX20" y="connsiteY20"/>
-                </a:cxn>
-              </a:cxnLst>
-              <a:rect l="l" t="t" r="r" b="b"/>
-              <a:pathLst>
-                <a:path w="801038" h="570598">
-                  <a:moveTo>
-                    <a:pt x="484955" y="0"/>
-                  </a:moveTo>
-                  <a:cubicBezTo>
-                    <a:pt x="614291" y="0"/>
-                    <a:pt x="719139" y="104848"/>
-                    <a:pt x="719139" y="234184"/>
-                  </a:cubicBezTo>
-                  <a:lnTo>
-                    <a:pt x="713016" y="264512"/>
-                  </a:lnTo>
-                  <a:lnTo>
-                    <a:pt x="750011" y="288196"/>
-                  </a:lnTo>
-                  <a:cubicBezTo>
-                    <a:pt x="781538" y="318133"/>
-                    <a:pt x="801038" y="359490"/>
-                    <a:pt x="801038" y="405171"/>
-                  </a:cubicBezTo>
-                  <a:cubicBezTo>
-                    <a:pt x="801038" y="473693"/>
-                    <a:pt x="757164" y="532485"/>
-                    <a:pt x="694635" y="557598"/>
-                  </a:cubicBezTo>
-                  <a:lnTo>
-                    <a:pt x="632231" y="569561"/>
-                  </a:lnTo>
-                  <a:lnTo>
-                    <a:pt x="632231" y="569790"/>
-                  </a:lnTo>
-                  <a:lnTo>
-                    <a:pt x="631037" y="569790"/>
-                  </a:lnTo>
-                  <a:lnTo>
-                    <a:pt x="626822" y="570598"/>
-                  </a:lnTo>
-                  <a:lnTo>
-                    <a:pt x="622607" y="569790"/>
-                  </a:lnTo>
-                  <a:lnTo>
-                    <a:pt x="178431" y="569790"/>
-                  </a:lnTo>
-                  <a:lnTo>
-                    <a:pt x="174216" y="570598"/>
-                  </a:lnTo>
-                  <a:cubicBezTo>
-                    <a:pt x="77999" y="570598"/>
-                    <a:pt x="0" y="496534"/>
-                    <a:pt x="0" y="405171"/>
-                  </a:cubicBezTo>
-                  <a:cubicBezTo>
-                    <a:pt x="0" y="336649"/>
-                    <a:pt x="43874" y="277857"/>
-                    <a:pt x="106403" y="252744"/>
-                  </a:cubicBezTo>
-                  <a:lnTo>
-                    <a:pt x="113189" y="251443"/>
-                  </a:lnTo>
-                  <a:lnTo>
-                    <a:pt x="114047" y="247193"/>
-                  </a:lnTo>
-                  <a:cubicBezTo>
-                    <a:pt x="134602" y="198594"/>
-                    <a:pt x="182725" y="164494"/>
-                    <a:pt x="238811" y="164494"/>
-                  </a:cubicBezTo>
-                  <a:lnTo>
-                    <a:pt x="261449" y="167916"/>
-                  </a:lnTo>
-                  <a:lnTo>
-                    <a:pt x="269174" y="143029"/>
-                  </a:lnTo>
-                  <a:cubicBezTo>
-                    <a:pt x="304726" y="58977"/>
-                    <a:pt x="387953" y="0"/>
-                    <a:pt x="484955" y="0"/>
-                  </a:cubicBezTo>
-                  <a:close/>
-                </a:path>
-              </a:pathLst>
-            </a:custGeom>
-            <a:noFill/>
-            <a:ln w="12700">
-              <a:solidFill>
-                <a:srgbClr val="FF5757"/>
-              </a:solidFill>
-            </a:ln>
-          </p:spPr>
-          <p:style>
-            <a:lnRef idx="2">
-              <a:schemeClr val="accent1">
-                <a:shade val="50000"/>
-              </a:schemeClr>
-            </a:lnRef>
-            <a:fillRef idx="1">
-              <a:schemeClr val="accent1"/>
-            </a:fillRef>
-            <a:effectRef idx="0">
-              <a:schemeClr val="accent1"/>
-            </a:effectRef>
-            <a:fontRef idx="minor">
-              <a:schemeClr val="lt1"/>
-            </a:fontRef>
-          </p:style>
-          <p:txBody>
-            <a:bodyPr rtlCol="0" anchor="ctr"/>
-            <a:lstStyle/>
-            <a:p>
-              <a:pPr algn="ctr"/>
-              <a:endParaRPr lang="en-US"/>
-            </a:p>
-          </p:txBody>
-        </p:sp>
-        <p:sp>
-          <p:nvSpPr>
-            <p:cNvPr id="30" name="TextBox 29">
-              <a:extLst>
-                <a:ext uri="{FF2B5EF4-FFF2-40B4-BE49-F238E27FC236}">
-                  <a16:creationId xmlns:a16="http://schemas.microsoft.com/office/drawing/2014/main" id="{365DFE3C-B656-8AAE-3ABA-CC539B572284}"/>
+                  <a16:creationId xmlns:a16="http://schemas.microsoft.com/office/drawing/2014/main" id="{68423097-AD09-EF4D-E5E9-D7F061AD728D}"/>
                 </a:ext>
               </a:extLst>
             </p:cNvPr>
@@ -4107,8 +3454,8 @@
           </p:nvSpPr>
           <p:spPr>
             <a:xfrm>
-              <a:off x="406515" y="1233726"/>
-              <a:ext cx="1179854" cy="668691"/>
+              <a:off x="2062342" y="148916"/>
+              <a:ext cx="805339" cy="276999"/>
             </a:xfrm>
             <a:prstGeom prst="rect">
               <a:avLst/>
@@ -4116,313 +3463,28 @@
             <a:noFill/>
           </p:spPr>
           <p:txBody>
-            <a:bodyPr wrap="none" rtlCol="0">
+            <a:bodyPr wrap="square">
               <a:spAutoFit/>
             </a:bodyPr>
             <a:lstStyle/>
             <a:p>
               <a:r>
-                <a:rPr lang="es-ES" sz="700" b="1" dirty="0">
-                  <a:solidFill>
-                    <a:srgbClr val="FF5757"/>
-                  </a:solidFill>
+                <a:rPr lang="en-US" sz="1200" dirty="0">
                   <a:latin typeface="Arial" panose="020B0604020202020204" pitchFamily="34" charset="0"/>
                   <a:cs typeface="Arial" panose="020B0604020202020204" pitchFamily="34" charset="0"/>
                 </a:rPr>
-                <a:t>CO</a:t>
+                <a:t>−90%</a:t>
               </a:r>
-              <a:r>
-                <a:rPr lang="es-ES" sz="700" b="1" baseline="-25000" dirty="0">
-                  <a:solidFill>
-                    <a:srgbClr val="FF5757"/>
-                  </a:solidFill>
-                  <a:latin typeface="Arial" panose="020B0604020202020204" pitchFamily="34" charset="0"/>
-                  <a:cs typeface="Arial" panose="020B0604020202020204" pitchFamily="34" charset="0"/>
-                </a:rPr>
-                <a:t>2</a:t>
-              </a:r>
-              <a:endParaRPr lang="en-US" sz="700" b="1" baseline="-25000" dirty="0">
-                <a:solidFill>
-                  <a:srgbClr val="FF5757"/>
-                </a:solidFill>
-                <a:latin typeface="Arial" panose="020B0604020202020204" pitchFamily="34" charset="0"/>
-                <a:cs typeface="Arial" panose="020B0604020202020204" pitchFamily="34" charset="0"/>
-              </a:endParaRPr>
-            </a:p>
-          </p:txBody>
-        </p:sp>
-      </p:grpSp>
-      <p:grpSp>
-        <p:nvGrpSpPr>
-          <p:cNvPr id="31" name="Group 30">
-            <a:extLst>
-              <a:ext uri="{FF2B5EF4-FFF2-40B4-BE49-F238E27FC236}">
-                <a16:creationId xmlns:a16="http://schemas.microsoft.com/office/drawing/2014/main" id="{A14E454B-8329-AF95-00CD-4C3F1B6403BC}"/>
-              </a:ext>
-            </a:extLst>
-          </p:cNvPr>
-          <p:cNvGrpSpPr/>
-          <p:nvPr/>
-        </p:nvGrpSpPr>
-        <p:grpSpPr>
-          <a:xfrm>
-            <a:off x="2537855" y="168897"/>
-            <a:ext cx="352982" cy="203183"/>
-            <a:chOff x="400147" y="1223271"/>
-            <a:chExt cx="1179854" cy="679146"/>
-          </a:xfrm>
-        </p:grpSpPr>
-        <p:sp>
-          <p:nvSpPr>
-            <p:cNvPr id="32" name="Freeform 39">
-              <a:extLst>
-                <a:ext uri="{FF2B5EF4-FFF2-40B4-BE49-F238E27FC236}">
-                  <a16:creationId xmlns:a16="http://schemas.microsoft.com/office/drawing/2014/main" id="{D3E860C6-6E40-6320-3CC5-9A2BDC147CB5}"/>
-                </a:ext>
-              </a:extLst>
-            </p:cNvPr>
-            <p:cNvSpPr/>
-            <p:nvPr/>
-          </p:nvSpPr>
-          <p:spPr>
-            <a:xfrm>
-              <a:off x="561409" y="1223271"/>
-              <a:ext cx="801038" cy="570598"/>
-            </a:xfrm>
-            <a:custGeom>
-              <a:avLst/>
-              <a:gdLst>
-                <a:gd name="connsiteX0" fmla="*/ 484955 w 801038"/>
-                <a:gd name="connsiteY0" fmla="*/ 0 h 570598"/>
-                <a:gd name="connsiteX1" fmla="*/ 719139 w 801038"/>
-                <a:gd name="connsiteY1" fmla="*/ 234184 h 570598"/>
-                <a:gd name="connsiteX2" fmla="*/ 713016 w 801038"/>
-                <a:gd name="connsiteY2" fmla="*/ 264512 h 570598"/>
-                <a:gd name="connsiteX3" fmla="*/ 750011 w 801038"/>
-                <a:gd name="connsiteY3" fmla="*/ 288196 h 570598"/>
-                <a:gd name="connsiteX4" fmla="*/ 801038 w 801038"/>
-                <a:gd name="connsiteY4" fmla="*/ 405171 h 570598"/>
-                <a:gd name="connsiteX5" fmla="*/ 694635 w 801038"/>
-                <a:gd name="connsiteY5" fmla="*/ 557598 h 570598"/>
-                <a:gd name="connsiteX6" fmla="*/ 632231 w 801038"/>
-                <a:gd name="connsiteY6" fmla="*/ 569561 h 570598"/>
-                <a:gd name="connsiteX7" fmla="*/ 632231 w 801038"/>
-                <a:gd name="connsiteY7" fmla="*/ 569790 h 570598"/>
-                <a:gd name="connsiteX8" fmla="*/ 631037 w 801038"/>
-                <a:gd name="connsiteY8" fmla="*/ 569790 h 570598"/>
-                <a:gd name="connsiteX9" fmla="*/ 626822 w 801038"/>
-                <a:gd name="connsiteY9" fmla="*/ 570598 h 570598"/>
-                <a:gd name="connsiteX10" fmla="*/ 622607 w 801038"/>
-                <a:gd name="connsiteY10" fmla="*/ 569790 h 570598"/>
-                <a:gd name="connsiteX11" fmla="*/ 178431 w 801038"/>
-                <a:gd name="connsiteY11" fmla="*/ 569790 h 570598"/>
-                <a:gd name="connsiteX12" fmla="*/ 174216 w 801038"/>
-                <a:gd name="connsiteY12" fmla="*/ 570598 h 570598"/>
-                <a:gd name="connsiteX13" fmla="*/ 0 w 801038"/>
-                <a:gd name="connsiteY13" fmla="*/ 405171 h 570598"/>
-                <a:gd name="connsiteX14" fmla="*/ 106403 w 801038"/>
-                <a:gd name="connsiteY14" fmla="*/ 252744 h 570598"/>
-                <a:gd name="connsiteX15" fmla="*/ 113189 w 801038"/>
-                <a:gd name="connsiteY15" fmla="*/ 251443 h 570598"/>
-                <a:gd name="connsiteX16" fmla="*/ 114047 w 801038"/>
-                <a:gd name="connsiteY16" fmla="*/ 247193 h 570598"/>
-                <a:gd name="connsiteX17" fmla="*/ 238811 w 801038"/>
-                <a:gd name="connsiteY17" fmla="*/ 164494 h 570598"/>
-                <a:gd name="connsiteX18" fmla="*/ 261449 w 801038"/>
-                <a:gd name="connsiteY18" fmla="*/ 167916 h 570598"/>
-                <a:gd name="connsiteX19" fmla="*/ 269174 w 801038"/>
-                <a:gd name="connsiteY19" fmla="*/ 143029 h 570598"/>
-                <a:gd name="connsiteX20" fmla="*/ 484955 w 801038"/>
-                <a:gd name="connsiteY20" fmla="*/ 0 h 570598"/>
-              </a:gdLst>
-              <a:ahLst/>
-              <a:cxnLst>
-                <a:cxn ang="0">
-                  <a:pos x="connsiteX0" y="connsiteY0"/>
-                </a:cxn>
-                <a:cxn ang="0">
-                  <a:pos x="connsiteX1" y="connsiteY1"/>
-                </a:cxn>
-                <a:cxn ang="0">
-                  <a:pos x="connsiteX2" y="connsiteY2"/>
-                </a:cxn>
-                <a:cxn ang="0">
-                  <a:pos x="connsiteX3" y="connsiteY3"/>
-                </a:cxn>
-                <a:cxn ang="0">
-                  <a:pos x="connsiteX4" y="connsiteY4"/>
-                </a:cxn>
-                <a:cxn ang="0">
-                  <a:pos x="connsiteX5" y="connsiteY5"/>
-                </a:cxn>
-                <a:cxn ang="0">
-                  <a:pos x="connsiteX6" y="connsiteY6"/>
-                </a:cxn>
-                <a:cxn ang="0">
-                  <a:pos x="connsiteX7" y="connsiteY7"/>
-                </a:cxn>
-                <a:cxn ang="0">
-                  <a:pos x="connsiteX8" y="connsiteY8"/>
-                </a:cxn>
-                <a:cxn ang="0">
-                  <a:pos x="connsiteX9" y="connsiteY9"/>
-                </a:cxn>
-                <a:cxn ang="0">
-                  <a:pos x="connsiteX10" y="connsiteY10"/>
-                </a:cxn>
-                <a:cxn ang="0">
-                  <a:pos x="connsiteX11" y="connsiteY11"/>
-                </a:cxn>
-                <a:cxn ang="0">
-                  <a:pos x="connsiteX12" y="connsiteY12"/>
-                </a:cxn>
-                <a:cxn ang="0">
-                  <a:pos x="connsiteX13" y="connsiteY13"/>
-                </a:cxn>
-                <a:cxn ang="0">
-                  <a:pos x="connsiteX14" y="connsiteY14"/>
-                </a:cxn>
-                <a:cxn ang="0">
-                  <a:pos x="connsiteX15" y="connsiteY15"/>
-                </a:cxn>
-                <a:cxn ang="0">
-                  <a:pos x="connsiteX16" y="connsiteY16"/>
-                </a:cxn>
-                <a:cxn ang="0">
-                  <a:pos x="connsiteX17" y="connsiteY17"/>
-                </a:cxn>
-                <a:cxn ang="0">
-                  <a:pos x="connsiteX18" y="connsiteY18"/>
-                </a:cxn>
-                <a:cxn ang="0">
-                  <a:pos x="connsiteX19" y="connsiteY19"/>
-                </a:cxn>
-                <a:cxn ang="0">
-                  <a:pos x="connsiteX20" y="connsiteY20"/>
-                </a:cxn>
-              </a:cxnLst>
-              <a:rect l="l" t="t" r="r" b="b"/>
-              <a:pathLst>
-                <a:path w="801038" h="570598">
-                  <a:moveTo>
-                    <a:pt x="484955" y="0"/>
-                  </a:moveTo>
-                  <a:cubicBezTo>
-                    <a:pt x="614291" y="0"/>
-                    <a:pt x="719139" y="104848"/>
-                    <a:pt x="719139" y="234184"/>
-                  </a:cubicBezTo>
-                  <a:lnTo>
-                    <a:pt x="713016" y="264512"/>
-                  </a:lnTo>
-                  <a:lnTo>
-                    <a:pt x="750011" y="288196"/>
-                  </a:lnTo>
-                  <a:cubicBezTo>
-                    <a:pt x="781538" y="318133"/>
-                    <a:pt x="801038" y="359490"/>
-                    <a:pt x="801038" y="405171"/>
-                  </a:cubicBezTo>
-                  <a:cubicBezTo>
-                    <a:pt x="801038" y="473693"/>
-                    <a:pt x="757164" y="532485"/>
-                    <a:pt x="694635" y="557598"/>
-                  </a:cubicBezTo>
-                  <a:lnTo>
-                    <a:pt x="632231" y="569561"/>
-                  </a:lnTo>
-                  <a:lnTo>
-                    <a:pt x="632231" y="569790"/>
-                  </a:lnTo>
-                  <a:lnTo>
-                    <a:pt x="631037" y="569790"/>
-                  </a:lnTo>
-                  <a:lnTo>
-                    <a:pt x="626822" y="570598"/>
-                  </a:lnTo>
-                  <a:lnTo>
-                    <a:pt x="622607" y="569790"/>
-                  </a:lnTo>
-                  <a:lnTo>
-                    <a:pt x="178431" y="569790"/>
-                  </a:lnTo>
-                  <a:lnTo>
-                    <a:pt x="174216" y="570598"/>
-                  </a:lnTo>
-                  <a:cubicBezTo>
-                    <a:pt x="77999" y="570598"/>
-                    <a:pt x="0" y="496534"/>
-                    <a:pt x="0" y="405171"/>
-                  </a:cubicBezTo>
-                  <a:cubicBezTo>
-                    <a:pt x="0" y="336649"/>
-                    <a:pt x="43874" y="277857"/>
-                    <a:pt x="106403" y="252744"/>
-                  </a:cubicBezTo>
-                  <a:lnTo>
-                    <a:pt x="113189" y="251443"/>
-                  </a:lnTo>
-                  <a:lnTo>
-                    <a:pt x="114047" y="247193"/>
-                  </a:lnTo>
-                  <a:cubicBezTo>
-                    <a:pt x="134602" y="198594"/>
-                    <a:pt x="182725" y="164494"/>
-                    <a:pt x="238811" y="164494"/>
-                  </a:cubicBezTo>
-                  <a:lnTo>
-                    <a:pt x="261449" y="167916"/>
-                  </a:lnTo>
-                  <a:lnTo>
-                    <a:pt x="269174" y="143029"/>
-                  </a:lnTo>
-                  <a:cubicBezTo>
-                    <a:pt x="304726" y="58977"/>
-                    <a:pt x="387953" y="0"/>
-                    <a:pt x="484955" y="0"/>
-                  </a:cubicBezTo>
-                  <a:close/>
-                </a:path>
-              </a:pathLst>
-            </a:custGeom>
-            <a:noFill/>
-            <a:ln w="12700">
-              <a:solidFill>
-                <a:srgbClr val="FF5757"/>
-              </a:solidFill>
-            </a:ln>
-          </p:spPr>
-          <p:style>
-            <a:lnRef idx="2">
-              <a:schemeClr val="accent1">
-                <a:shade val="50000"/>
-              </a:schemeClr>
-            </a:lnRef>
-            <a:fillRef idx="1">
-              <a:schemeClr val="accent1"/>
-            </a:fillRef>
-            <a:effectRef idx="0">
-              <a:schemeClr val="accent1"/>
-            </a:effectRef>
-            <a:fontRef idx="minor">
-              <a:schemeClr val="lt1"/>
-            </a:fontRef>
-          </p:style>
-          <p:txBody>
-            <a:bodyPr rtlCol="0" anchor="ctr"/>
-            <a:lstStyle/>
-            <a:p>
-              <a:pPr algn="ctr"/>
-              <a:endParaRPr lang="en-US"/>
+              <a:endParaRPr lang="en-US" sz="1200" dirty="0"/>
             </a:p>
           </p:txBody>
         </p:sp>
         <p:sp>
           <p:nvSpPr>
-            <p:cNvPr id="33" name="TextBox 32">
+            <p:cNvPr id="8" name="TextBox 7">
               <a:extLst>
                 <a:ext uri="{FF2B5EF4-FFF2-40B4-BE49-F238E27FC236}">
-                  <a16:creationId xmlns:a16="http://schemas.microsoft.com/office/drawing/2014/main" id="{3BF821A0-85BF-6B75-724D-5D40D57A5F5B}"/>
+                  <a16:creationId xmlns:a16="http://schemas.microsoft.com/office/drawing/2014/main" id="{5369BDC3-1371-A8B7-8C72-C3B927D924CF}"/>
                 </a:ext>
               </a:extLst>
             </p:cNvPr>
@@ -4431,8 +3493,8 @@
           </p:nvSpPr>
           <p:spPr>
             <a:xfrm>
-              <a:off x="400147" y="1233726"/>
-              <a:ext cx="1179854" cy="668691"/>
+              <a:off x="2061050" y="532029"/>
+              <a:ext cx="805339" cy="276999"/>
             </a:xfrm>
             <a:prstGeom prst="rect">
               <a:avLst/>
@@ -4440,68 +3502,75 @@
             <a:noFill/>
           </p:spPr>
           <p:txBody>
-            <a:bodyPr wrap="none" rtlCol="0">
+            <a:bodyPr wrap="square">
               <a:spAutoFit/>
             </a:bodyPr>
             <a:lstStyle/>
             <a:p>
               <a:r>
-                <a:rPr lang="es-ES" sz="700" b="1" dirty="0">
-                  <a:solidFill>
-                    <a:srgbClr val="FF5757"/>
-                  </a:solidFill>
+                <a:rPr lang="en-US" sz="1200" dirty="0">
                   <a:latin typeface="Arial" panose="020B0604020202020204" pitchFamily="34" charset="0"/>
                   <a:cs typeface="Arial" panose="020B0604020202020204" pitchFamily="34" charset="0"/>
                 </a:rPr>
-                <a:t>CO</a:t>
+                <a:t>−10%</a:t>
               </a:r>
-              <a:r>
-                <a:rPr lang="es-ES" sz="700" b="1" baseline="-25000" dirty="0">
-                  <a:solidFill>
-                    <a:srgbClr val="FF5757"/>
-                  </a:solidFill>
-                  <a:latin typeface="Arial" panose="020B0604020202020204" pitchFamily="34" charset="0"/>
-                  <a:cs typeface="Arial" panose="020B0604020202020204" pitchFamily="34" charset="0"/>
-                </a:rPr>
-                <a:t>2</a:t>
-              </a:r>
-              <a:endParaRPr lang="en-US" sz="700" b="1" baseline="-25000" dirty="0">
-                <a:solidFill>
-                  <a:srgbClr val="FF5757"/>
-                </a:solidFill>
-                <a:latin typeface="Arial" panose="020B0604020202020204" pitchFamily="34" charset="0"/>
-                <a:cs typeface="Arial" panose="020B0604020202020204" pitchFamily="34" charset="0"/>
-              </a:endParaRPr>
+              <a:endParaRPr lang="en-US" sz="1200" dirty="0"/>
             </a:p>
           </p:txBody>
         </p:sp>
-      </p:grpSp>
-      <p:grpSp>
-        <p:nvGrpSpPr>
-          <p:cNvPr id="19" name="Group 18">
-            <a:extLst>
-              <a:ext uri="{FF2B5EF4-FFF2-40B4-BE49-F238E27FC236}">
-                <a16:creationId xmlns:a16="http://schemas.microsoft.com/office/drawing/2014/main" id="{7D702468-33C1-95B8-16A3-113E064F2CCD}"/>
-              </a:ext>
-            </a:extLst>
-          </p:cNvPr>
-          <p:cNvGrpSpPr/>
-          <p:nvPr/>
-        </p:nvGrpSpPr>
-        <p:grpSpPr>
-          <a:xfrm>
-            <a:off x="-22174" y="1100538"/>
-            <a:ext cx="383439" cy="357779"/>
-            <a:chOff x="2591" y="1089108"/>
-            <a:chExt cx="383439" cy="357779"/>
-          </a:xfrm>
-        </p:grpSpPr>
+        <p:cxnSp>
+          <p:nvCxnSpPr>
+            <p:cNvPr id="22" name="Straight Arrow Connector 21">
+              <a:extLst>
+                <a:ext uri="{FF2B5EF4-FFF2-40B4-BE49-F238E27FC236}">
+                  <a16:creationId xmlns:a16="http://schemas.microsoft.com/office/drawing/2014/main" id="{FE183C5C-E470-8B03-4603-B8CBF71ED483}"/>
+                </a:ext>
+              </a:extLst>
+            </p:cNvPr>
+            <p:cNvCxnSpPr>
+              <a:cxnSpLocks/>
+            </p:cNvCxnSpPr>
+            <p:nvPr/>
+          </p:nvCxnSpPr>
+          <p:spPr>
+            <a:xfrm>
+              <a:off x="93345" y="280056"/>
+              <a:ext cx="1992630" cy="0"/>
+            </a:xfrm>
+            <a:prstGeom prst="straightConnector1">
+              <a:avLst/>
+            </a:prstGeom>
+            <a:ln cap="rnd">
+              <a:solidFill>
+                <a:schemeClr val="accent6">
+                  <a:lumMod val="20000"/>
+                  <a:lumOff val="80000"/>
+                </a:schemeClr>
+              </a:solidFill>
+              <a:tailEnd type="triangle"/>
+            </a:ln>
+          </p:spPr>
+          <p:style>
+            <a:lnRef idx="2">
+              <a:schemeClr val="accent1"/>
+            </a:lnRef>
+            <a:fillRef idx="0">
+              <a:schemeClr val="accent1"/>
+            </a:fillRef>
+            <a:effectRef idx="1">
+              <a:schemeClr val="accent1"/>
+            </a:effectRef>
+            <a:fontRef idx="minor">
+              <a:schemeClr val="tx1"/>
+            </a:fontRef>
+          </p:style>
+        </p:cxnSp>
         <p:sp>
           <p:nvSpPr>
-            <p:cNvPr id="7" name="TextBox 6">
+            <p:cNvPr id="10" name="TextBox 9">
               <a:extLst>
                 <a:ext uri="{FF2B5EF4-FFF2-40B4-BE49-F238E27FC236}">
-                  <a16:creationId xmlns:a16="http://schemas.microsoft.com/office/drawing/2014/main" id="{7BA2EC7A-565B-58C7-4DFE-8816D578A418}"/>
+                  <a16:creationId xmlns:a16="http://schemas.microsoft.com/office/drawing/2014/main" id="{533644A2-A98F-753D-7D45-B5ADF23DBFB0}"/>
                 </a:ext>
               </a:extLst>
             </p:cNvPr>
@@ -4510,8 +3579,8 @@
           </p:nvSpPr>
           <p:spPr>
             <a:xfrm>
-              <a:off x="2591" y="1246832"/>
-              <a:ext cx="383439" cy="200055"/>
+              <a:off x="-24764" y="350873"/>
+              <a:ext cx="2171699" cy="369332"/>
             </a:xfrm>
             <a:prstGeom prst="rect">
               <a:avLst/>
@@ -4519,140 +3588,91 @@
             <a:noFill/>
           </p:spPr>
           <p:txBody>
-            <a:bodyPr wrap="none" rtlCol="0">
+            <a:bodyPr wrap="square" rtlCol="0">
               <a:spAutoFit/>
             </a:bodyPr>
             <a:lstStyle/>
             <a:p>
-              <a:pPr algn="ctr"/>
               <a:r>
-                <a:rPr lang="en-US" sz="700" dirty="0">
+                <a:rPr lang="en-US" spc="400" dirty="0">
                   <a:solidFill>
                     <a:schemeClr val="tx1">
-                      <a:lumMod val="75000"/>
-                      <a:lumOff val="25000"/>
+                      <a:lumMod val="50000"/>
+                      <a:lumOff val="50000"/>
                     </a:schemeClr>
                   </a:solidFill>
                   <a:latin typeface="Arial" panose="020B0604020202020204" pitchFamily="34" charset="0"/>
                   <a:cs typeface="Arial" panose="020B0604020202020204" pitchFamily="34" charset="0"/>
                 </a:rPr>
-                <a:t>2020</a:t>
+                <a:t>Fos</a:t>
               </a:r>
-            </a:p>
-          </p:txBody>
-        </p:sp>
-        <p:pic>
-          <p:nvPicPr>
-            <p:cNvPr id="41" name="Picture 40">
-              <a:extLst>
-                <a:ext uri="{FF2B5EF4-FFF2-40B4-BE49-F238E27FC236}">
-                  <a16:creationId xmlns:a16="http://schemas.microsoft.com/office/drawing/2014/main" id="{324547CC-8E6A-5B13-60F0-01C2F296E069}"/>
-                </a:ext>
-              </a:extLst>
-            </p:cNvPr>
-            <p:cNvPicPr>
-              <a:picLocks noChangeAspect="1"/>
-            </p:cNvPicPr>
-            <p:nvPr/>
-          </p:nvPicPr>
-          <p:blipFill>
-            <a:blip r:embed="rId3"/>
-            <a:stretch>
-              <a:fillRect/>
-            </a:stretch>
-          </p:blipFill>
-          <p:spPr>
-            <a:xfrm>
-              <a:off x="108343" y="1089108"/>
-              <a:ext cx="167003" cy="200055"/>
-            </a:xfrm>
-            <a:prstGeom prst="rect">
-              <a:avLst/>
-            </a:prstGeom>
-          </p:spPr>
-        </p:pic>
-      </p:grpSp>
-      <p:sp>
-        <p:nvSpPr>
-          <p:cNvPr id="42" name="TextBox 41">
-            <a:extLst>
-              <a:ext uri="{FF2B5EF4-FFF2-40B4-BE49-F238E27FC236}">
-                <a16:creationId xmlns:a16="http://schemas.microsoft.com/office/drawing/2014/main" id="{6183D45F-7733-37DC-32D0-042025016995}"/>
-              </a:ext>
-            </a:extLst>
-          </p:cNvPr>
-          <p:cNvSpPr txBox="1"/>
-          <p:nvPr/>
-        </p:nvSpPr>
-        <p:spPr>
-          <a:xfrm>
-            <a:off x="-10242" y="833075"/>
-            <a:ext cx="1553292" cy="200055"/>
-          </a:xfrm>
-          <a:prstGeom prst="rect">
-            <a:avLst/>
-          </a:prstGeom>
-          <a:noFill/>
-        </p:spPr>
-        <p:txBody>
-          <a:bodyPr wrap="square" rtlCol="0">
-            <a:spAutoFit/>
-          </a:bodyPr>
-          <a:lstStyle>
-            <a:defPPr>
-              <a:defRPr lang="en-US"/>
-            </a:defPPr>
-            <a:lvl1pPr>
-              <a:defRPr spc="400">
+              <a:r>
+                <a:rPr lang="en-US" spc="400" dirty="0">
+                  <a:solidFill>
+                    <a:schemeClr val="bg1">
+                      <a:lumMod val="50000"/>
+                    </a:schemeClr>
+                  </a:solidFill>
+                  <a:latin typeface="Arial" panose="020B0604020202020204" pitchFamily="34" charset="0"/>
+                  <a:cs typeface="Arial" panose="020B0604020202020204" pitchFamily="34" charset="0"/>
+                </a:rPr>
+                <a:t>sil</a:t>
+              </a:r>
+              <a:r>
+                <a:rPr lang="en-US" spc="400" dirty="0">
+                  <a:solidFill>
+                    <a:schemeClr val="accent6">
+                      <a:lumMod val="20000"/>
+                      <a:lumOff val="80000"/>
+                    </a:schemeClr>
+                  </a:solidFill>
+                  <a:latin typeface="Arial" panose="020B0604020202020204" pitchFamily="34" charset="0"/>
+                  <a:cs typeface="Arial" panose="020B0604020202020204" pitchFamily="34" charset="0"/>
+                </a:rPr>
+                <a:t> </a:t>
+              </a:r>
+              <a:r>
+                <a:rPr lang="en-US" spc="400" dirty="0">
+                  <a:solidFill>
+                    <a:schemeClr val="bg1">
+                      <a:lumMod val="65000"/>
+                    </a:schemeClr>
+                  </a:solidFill>
+                  <a:latin typeface="Arial" panose="020B0604020202020204" pitchFamily="34" charset="0"/>
+                  <a:cs typeface="Arial" panose="020B0604020202020204" pitchFamily="34" charset="0"/>
+                </a:rPr>
+                <a:t>rou</a:t>
+              </a:r>
+              <a:r>
+                <a:rPr lang="en-US" spc="400" dirty="0">
+                  <a:solidFill>
+                    <a:schemeClr val="bg1">
+                      <a:lumMod val="75000"/>
+                    </a:schemeClr>
+                  </a:solidFill>
+                  <a:latin typeface="Arial" panose="020B0604020202020204" pitchFamily="34" charset="0"/>
+                  <a:cs typeface="Arial" panose="020B0604020202020204" pitchFamily="34" charset="0"/>
+                </a:rPr>
+                <a:t>tes</a:t>
+              </a:r>
+              <a:endParaRPr lang="en-US" sz="900" baseline="-25000" dirty="0">
                 <a:solidFill>
-                  <a:schemeClr val="accent6">
-                    <a:lumMod val="20000"/>
-                    <a:lumOff val="80000"/>
+                  <a:schemeClr val="bg1">
+                    <a:lumMod val="75000"/>
                   </a:schemeClr>
                 </a:solidFill>
                 <a:latin typeface="Arial" panose="020B0604020202020204" pitchFamily="34" charset="0"/>
                 <a:cs typeface="Arial" panose="020B0604020202020204" pitchFamily="34" charset="0"/>
-              </a:defRPr>
-            </a:lvl1pPr>
-          </a:lstStyle>
-          <a:p>
-            <a:r>
-              <a:rPr lang="en-US" sz="700" b="1" spc="200" dirty="0">
-                <a:solidFill>
-                  <a:schemeClr val="tx1"/>
-                </a:solidFill>
-              </a:rPr>
-              <a:t>Climate policies</a:t>
-            </a:r>
-          </a:p>
-        </p:txBody>
-      </p:sp>
-      <p:grpSp>
-        <p:nvGrpSpPr>
-          <p:cNvPr id="18" name="Group 17">
-            <a:extLst>
-              <a:ext uri="{FF2B5EF4-FFF2-40B4-BE49-F238E27FC236}">
-                <a16:creationId xmlns:a16="http://schemas.microsoft.com/office/drawing/2014/main" id="{B64F5623-D164-6B54-95E9-3DCA208FCFF5}"/>
-              </a:ext>
-            </a:extLst>
-          </p:cNvPr>
-          <p:cNvGrpSpPr/>
-          <p:nvPr/>
-        </p:nvGrpSpPr>
-        <p:grpSpPr>
-          <a:xfrm>
-            <a:off x="808793" y="1023183"/>
-            <a:ext cx="383439" cy="435134"/>
-            <a:chOff x="841813" y="1011753"/>
-            <a:chExt cx="383439" cy="435134"/>
-          </a:xfrm>
-        </p:grpSpPr>
+              </a:endParaRPr>
+            </a:p>
+          </p:txBody>
+        </p:sp>
         <p:sp>
           <p:nvSpPr>
-            <p:cNvPr id="9" name="TextBox 8">
+            <p:cNvPr id="4" name="TextBox 3">
               <a:extLst>
                 <a:ext uri="{FF2B5EF4-FFF2-40B4-BE49-F238E27FC236}">
-                  <a16:creationId xmlns:a16="http://schemas.microsoft.com/office/drawing/2014/main" id="{0E788515-4C07-9999-81E3-35871F31D652}"/>
+                  <a16:creationId xmlns:a16="http://schemas.microsoft.com/office/drawing/2014/main" id="{9CC25F9F-D5DC-903C-0214-23FB9DF62F58}"/>
                 </a:ext>
               </a:extLst>
             </p:cNvPr>
@@ -4661,8 +3681,8 @@
           </p:nvSpPr>
           <p:spPr>
             <a:xfrm>
-              <a:off x="841813" y="1246832"/>
-              <a:ext cx="383439" cy="200055"/>
+              <a:off x="-24764" y="-30340"/>
+              <a:ext cx="2171699" cy="369332"/>
             </a:xfrm>
             <a:prstGeom prst="rect">
               <a:avLst/>
@@ -4670,85 +3690,914 @@
             <a:noFill/>
           </p:spPr>
           <p:txBody>
-            <a:bodyPr wrap="none" rtlCol="0">
+            <a:bodyPr wrap="square" rtlCol="0">
               <a:spAutoFit/>
             </a:bodyPr>
             <a:lstStyle/>
             <a:p>
-              <a:pPr algn="ctr"/>
               <a:r>
-                <a:rPr lang="en-US" sz="700" dirty="0">
+                <a:rPr lang="en-US" spc="400" dirty="0">
                   <a:solidFill>
-                    <a:schemeClr val="tx1">
-                      <a:lumMod val="75000"/>
-                      <a:lumOff val="25000"/>
+                    <a:schemeClr val="accent6">
+                      <a:lumMod val="20000"/>
+                      <a:lumOff val="80000"/>
                     </a:schemeClr>
                   </a:solidFill>
                   <a:latin typeface="Arial" panose="020B0604020202020204" pitchFamily="34" charset="0"/>
                   <a:cs typeface="Arial" panose="020B0604020202020204" pitchFamily="34" charset="0"/>
                 </a:rPr>
-                <a:t>2030</a:t>
+                <a:t>G</a:t>
               </a:r>
+              <a:r>
+                <a:rPr lang="en-US" spc="400" dirty="0">
+                  <a:solidFill>
+                    <a:srgbClr val="CAEDBD"/>
+                  </a:solidFill>
+                  <a:latin typeface="Arial" panose="020B0604020202020204" pitchFamily="34" charset="0"/>
+                  <a:cs typeface="Arial" panose="020B0604020202020204" pitchFamily="34" charset="0"/>
+                </a:rPr>
+                <a:t>r</a:t>
+              </a:r>
+              <a:r>
+                <a:rPr lang="en-US" spc="400" dirty="0">
+                  <a:solidFill>
+                    <a:srgbClr val="C5EBB7"/>
+                  </a:solidFill>
+                  <a:latin typeface="Arial" panose="020B0604020202020204" pitchFamily="34" charset="0"/>
+                  <a:cs typeface="Arial" panose="020B0604020202020204" pitchFamily="34" charset="0"/>
+                </a:rPr>
+                <a:t>e</a:t>
+              </a:r>
+              <a:r>
+                <a:rPr lang="en-US" spc="400" dirty="0">
+                  <a:solidFill>
+                    <a:srgbClr val="BAE8AA"/>
+                  </a:solidFill>
+                  <a:latin typeface="Arial" panose="020B0604020202020204" pitchFamily="34" charset="0"/>
+                  <a:cs typeface="Arial" panose="020B0604020202020204" pitchFamily="34" charset="0"/>
+                </a:rPr>
+                <a:t>e</a:t>
+              </a:r>
+              <a:r>
+                <a:rPr lang="en-US" spc="400" dirty="0">
+                  <a:solidFill>
+                    <a:srgbClr val="AAE296"/>
+                  </a:solidFill>
+                  <a:latin typeface="Arial" panose="020B0604020202020204" pitchFamily="34" charset="0"/>
+                  <a:cs typeface="Arial" panose="020B0604020202020204" pitchFamily="34" charset="0"/>
+                </a:rPr>
+                <a:t>n</a:t>
+              </a:r>
+              <a:r>
+                <a:rPr lang="en-US" spc="400" dirty="0">
+                  <a:solidFill>
+                    <a:schemeClr val="accent6">
+                      <a:lumMod val="20000"/>
+                      <a:lumOff val="80000"/>
+                    </a:schemeClr>
+                  </a:solidFill>
+                  <a:latin typeface="Arial" panose="020B0604020202020204" pitchFamily="34" charset="0"/>
+                  <a:cs typeface="Arial" panose="020B0604020202020204" pitchFamily="34" charset="0"/>
+                </a:rPr>
+                <a:t> </a:t>
+              </a:r>
+              <a:r>
+                <a:rPr lang="en-US" spc="400" dirty="0">
+                  <a:solidFill>
+                    <a:srgbClr val="7DD35F"/>
+                  </a:solidFill>
+                  <a:latin typeface="Arial" panose="020B0604020202020204" pitchFamily="34" charset="0"/>
+                  <a:cs typeface="Arial" panose="020B0604020202020204" pitchFamily="34" charset="0"/>
+                </a:rPr>
+                <a:t>r</a:t>
+              </a:r>
+              <a:r>
+                <a:rPr lang="en-US" spc="400" dirty="0">
+                  <a:solidFill>
+                    <a:srgbClr val="68CC44"/>
+                  </a:solidFill>
+                  <a:latin typeface="Arial" panose="020B0604020202020204" pitchFamily="34" charset="0"/>
+                  <a:cs typeface="Arial" panose="020B0604020202020204" pitchFamily="34" charset="0"/>
+                </a:rPr>
+                <a:t>o</a:t>
+              </a:r>
+              <a:r>
+                <a:rPr lang="en-US" spc="400" dirty="0">
+                  <a:solidFill>
+                    <a:srgbClr val="57BB33"/>
+                  </a:solidFill>
+                  <a:latin typeface="Arial" panose="020B0604020202020204" pitchFamily="34" charset="0"/>
+                  <a:cs typeface="Arial" panose="020B0604020202020204" pitchFamily="34" charset="0"/>
+                </a:rPr>
+                <a:t>u</a:t>
+              </a:r>
+              <a:r>
+                <a:rPr lang="en-US" spc="400" dirty="0">
+                  <a:solidFill>
+                    <a:srgbClr val="52A535"/>
+                  </a:solidFill>
+                  <a:latin typeface="Arial" panose="020B0604020202020204" pitchFamily="34" charset="0"/>
+                  <a:cs typeface="Arial" panose="020B0604020202020204" pitchFamily="34" charset="0"/>
+                </a:rPr>
+                <a:t>t</a:t>
+              </a:r>
+              <a:r>
+                <a:rPr lang="en-US" spc="400" dirty="0">
+                  <a:solidFill>
+                    <a:srgbClr val="41822A"/>
+                  </a:solidFill>
+                  <a:latin typeface="Arial" panose="020B0604020202020204" pitchFamily="34" charset="0"/>
+                  <a:cs typeface="Arial" panose="020B0604020202020204" pitchFamily="34" charset="0"/>
+                </a:rPr>
+                <a:t>e</a:t>
+              </a:r>
+              <a:r>
+                <a:rPr lang="en-US" spc="400" dirty="0">
+                  <a:solidFill>
+                    <a:srgbClr val="316220"/>
+                  </a:solidFill>
+                  <a:latin typeface="Arial" panose="020B0604020202020204" pitchFamily="34" charset="0"/>
+                  <a:cs typeface="Arial" panose="020B0604020202020204" pitchFamily="34" charset="0"/>
+                </a:rPr>
+                <a:t>s</a:t>
+              </a:r>
+              <a:r>
+                <a:rPr lang="en-US" sz="1100" dirty="0">
+                  <a:solidFill>
+                    <a:schemeClr val="bg1"/>
+                  </a:solidFill>
+                  <a:latin typeface="Arial" panose="020B0604020202020204" pitchFamily="34" charset="0"/>
+                  <a:cs typeface="Arial" panose="020B0604020202020204" pitchFamily="34" charset="0"/>
+                </a:rPr>
+                <a:t>    </a:t>
+              </a:r>
+              <a:r>
+                <a:rPr lang="en-US" dirty="0">
+                  <a:solidFill>
+                    <a:schemeClr val="bg1"/>
+                  </a:solidFill>
+                  <a:latin typeface="Arial" panose="020B0604020202020204" pitchFamily="34" charset="0"/>
+                  <a:cs typeface="Arial" panose="020B0604020202020204" pitchFamily="34" charset="0"/>
+                </a:rPr>
+                <a:t>        </a:t>
+              </a:r>
+              <a:endParaRPr lang="en-US" baseline="-25000" dirty="0">
+                <a:latin typeface="Arial" panose="020B0604020202020204" pitchFamily="34" charset="0"/>
+                <a:cs typeface="Arial" panose="020B0604020202020204" pitchFamily="34" charset="0"/>
+              </a:endParaRPr>
             </a:p>
           </p:txBody>
         </p:sp>
-        <p:pic>
-          <p:nvPicPr>
-            <p:cNvPr id="43" name="Picture 42">
+        <p:grpSp>
+          <p:nvGrpSpPr>
+            <p:cNvPr id="28" name="Group 27">
               <a:extLst>
                 <a:ext uri="{FF2B5EF4-FFF2-40B4-BE49-F238E27FC236}">
-                  <a16:creationId xmlns:a16="http://schemas.microsoft.com/office/drawing/2014/main" id="{4133AD86-8F1A-947C-3F22-C488359FDF67}"/>
+                  <a16:creationId xmlns:a16="http://schemas.microsoft.com/office/drawing/2014/main" id="{E94C6D85-5F98-CC54-B529-E3ED0EF7E958}"/>
                 </a:ext>
               </a:extLst>
             </p:cNvPr>
-            <p:cNvPicPr>
-              <a:picLocks noChangeAspect="1"/>
-            </p:cNvPicPr>
+            <p:cNvGrpSpPr/>
             <p:nvPr/>
-          </p:nvPicPr>
-          <p:blipFill>
-            <a:blip r:embed="rId3"/>
-            <a:stretch>
-              <a:fillRect/>
-            </a:stretch>
-          </p:blipFill>
-          <p:spPr>
+          </p:nvGrpSpPr>
+          <p:grpSpPr>
             <a:xfrm>
-              <a:off x="917085" y="1011753"/>
-              <a:ext cx="231578" cy="277411"/>
+              <a:off x="2539760" y="548934"/>
+              <a:ext cx="352982" cy="203183"/>
+              <a:chOff x="406515" y="1223271"/>
+              <a:chExt cx="1179854" cy="679146"/>
             </a:xfrm>
-            <a:prstGeom prst="rect">
-              <a:avLst/>
-            </a:prstGeom>
-          </p:spPr>
-        </p:pic>
-      </p:grpSp>
-      <p:grpSp>
-        <p:nvGrpSpPr>
-          <p:cNvPr id="17" name="Group 16">
-            <a:extLst>
-              <a:ext uri="{FF2B5EF4-FFF2-40B4-BE49-F238E27FC236}">
-                <a16:creationId xmlns:a16="http://schemas.microsoft.com/office/drawing/2014/main" id="{DFE7F8B3-0DD7-1CEC-2521-426F3748106B}"/>
-              </a:ext>
-            </a:extLst>
-          </p:cNvPr>
-          <p:cNvGrpSpPr/>
-          <p:nvPr/>
-        </p:nvGrpSpPr>
-        <p:grpSpPr>
-          <a:xfrm>
-            <a:off x="1639760" y="954067"/>
-            <a:ext cx="383439" cy="504250"/>
-            <a:chOff x="1648650" y="942637"/>
-            <a:chExt cx="383439" cy="504250"/>
-          </a:xfrm>
-        </p:grpSpPr>
+          </p:grpSpPr>
+          <p:sp>
+            <p:nvSpPr>
+              <p:cNvPr id="29" name="Freeform 39">
+                <a:extLst>
+                  <a:ext uri="{FF2B5EF4-FFF2-40B4-BE49-F238E27FC236}">
+                    <a16:creationId xmlns:a16="http://schemas.microsoft.com/office/drawing/2014/main" id="{5050812F-EDBA-FB88-3649-A4DCC2509FF1}"/>
+                  </a:ext>
+                </a:extLst>
+              </p:cNvPr>
+              <p:cNvSpPr/>
+              <p:nvPr/>
+            </p:nvSpPr>
+            <p:spPr>
+              <a:xfrm>
+                <a:off x="561409" y="1223271"/>
+                <a:ext cx="801038" cy="570598"/>
+              </a:xfrm>
+              <a:custGeom>
+                <a:avLst/>
+                <a:gdLst>
+                  <a:gd name="connsiteX0" fmla="*/ 484955 w 801038"/>
+                  <a:gd name="connsiteY0" fmla="*/ 0 h 570598"/>
+                  <a:gd name="connsiteX1" fmla="*/ 719139 w 801038"/>
+                  <a:gd name="connsiteY1" fmla="*/ 234184 h 570598"/>
+                  <a:gd name="connsiteX2" fmla="*/ 713016 w 801038"/>
+                  <a:gd name="connsiteY2" fmla="*/ 264512 h 570598"/>
+                  <a:gd name="connsiteX3" fmla="*/ 750011 w 801038"/>
+                  <a:gd name="connsiteY3" fmla="*/ 288196 h 570598"/>
+                  <a:gd name="connsiteX4" fmla="*/ 801038 w 801038"/>
+                  <a:gd name="connsiteY4" fmla="*/ 405171 h 570598"/>
+                  <a:gd name="connsiteX5" fmla="*/ 694635 w 801038"/>
+                  <a:gd name="connsiteY5" fmla="*/ 557598 h 570598"/>
+                  <a:gd name="connsiteX6" fmla="*/ 632231 w 801038"/>
+                  <a:gd name="connsiteY6" fmla="*/ 569561 h 570598"/>
+                  <a:gd name="connsiteX7" fmla="*/ 632231 w 801038"/>
+                  <a:gd name="connsiteY7" fmla="*/ 569790 h 570598"/>
+                  <a:gd name="connsiteX8" fmla="*/ 631037 w 801038"/>
+                  <a:gd name="connsiteY8" fmla="*/ 569790 h 570598"/>
+                  <a:gd name="connsiteX9" fmla="*/ 626822 w 801038"/>
+                  <a:gd name="connsiteY9" fmla="*/ 570598 h 570598"/>
+                  <a:gd name="connsiteX10" fmla="*/ 622607 w 801038"/>
+                  <a:gd name="connsiteY10" fmla="*/ 569790 h 570598"/>
+                  <a:gd name="connsiteX11" fmla="*/ 178431 w 801038"/>
+                  <a:gd name="connsiteY11" fmla="*/ 569790 h 570598"/>
+                  <a:gd name="connsiteX12" fmla="*/ 174216 w 801038"/>
+                  <a:gd name="connsiteY12" fmla="*/ 570598 h 570598"/>
+                  <a:gd name="connsiteX13" fmla="*/ 0 w 801038"/>
+                  <a:gd name="connsiteY13" fmla="*/ 405171 h 570598"/>
+                  <a:gd name="connsiteX14" fmla="*/ 106403 w 801038"/>
+                  <a:gd name="connsiteY14" fmla="*/ 252744 h 570598"/>
+                  <a:gd name="connsiteX15" fmla="*/ 113189 w 801038"/>
+                  <a:gd name="connsiteY15" fmla="*/ 251443 h 570598"/>
+                  <a:gd name="connsiteX16" fmla="*/ 114047 w 801038"/>
+                  <a:gd name="connsiteY16" fmla="*/ 247193 h 570598"/>
+                  <a:gd name="connsiteX17" fmla="*/ 238811 w 801038"/>
+                  <a:gd name="connsiteY17" fmla="*/ 164494 h 570598"/>
+                  <a:gd name="connsiteX18" fmla="*/ 261449 w 801038"/>
+                  <a:gd name="connsiteY18" fmla="*/ 167916 h 570598"/>
+                  <a:gd name="connsiteX19" fmla="*/ 269174 w 801038"/>
+                  <a:gd name="connsiteY19" fmla="*/ 143029 h 570598"/>
+                  <a:gd name="connsiteX20" fmla="*/ 484955 w 801038"/>
+                  <a:gd name="connsiteY20" fmla="*/ 0 h 570598"/>
+                </a:gdLst>
+                <a:ahLst/>
+                <a:cxnLst>
+                  <a:cxn ang="0">
+                    <a:pos x="connsiteX0" y="connsiteY0"/>
+                  </a:cxn>
+                  <a:cxn ang="0">
+                    <a:pos x="connsiteX1" y="connsiteY1"/>
+                  </a:cxn>
+                  <a:cxn ang="0">
+                    <a:pos x="connsiteX2" y="connsiteY2"/>
+                  </a:cxn>
+                  <a:cxn ang="0">
+                    <a:pos x="connsiteX3" y="connsiteY3"/>
+                  </a:cxn>
+                  <a:cxn ang="0">
+                    <a:pos x="connsiteX4" y="connsiteY4"/>
+                  </a:cxn>
+                  <a:cxn ang="0">
+                    <a:pos x="connsiteX5" y="connsiteY5"/>
+                  </a:cxn>
+                  <a:cxn ang="0">
+                    <a:pos x="connsiteX6" y="connsiteY6"/>
+                  </a:cxn>
+                  <a:cxn ang="0">
+                    <a:pos x="connsiteX7" y="connsiteY7"/>
+                  </a:cxn>
+                  <a:cxn ang="0">
+                    <a:pos x="connsiteX8" y="connsiteY8"/>
+                  </a:cxn>
+                  <a:cxn ang="0">
+                    <a:pos x="connsiteX9" y="connsiteY9"/>
+                  </a:cxn>
+                  <a:cxn ang="0">
+                    <a:pos x="connsiteX10" y="connsiteY10"/>
+                  </a:cxn>
+                  <a:cxn ang="0">
+                    <a:pos x="connsiteX11" y="connsiteY11"/>
+                  </a:cxn>
+                  <a:cxn ang="0">
+                    <a:pos x="connsiteX12" y="connsiteY12"/>
+                  </a:cxn>
+                  <a:cxn ang="0">
+                    <a:pos x="connsiteX13" y="connsiteY13"/>
+                  </a:cxn>
+                  <a:cxn ang="0">
+                    <a:pos x="connsiteX14" y="connsiteY14"/>
+                  </a:cxn>
+                  <a:cxn ang="0">
+                    <a:pos x="connsiteX15" y="connsiteY15"/>
+                  </a:cxn>
+                  <a:cxn ang="0">
+                    <a:pos x="connsiteX16" y="connsiteY16"/>
+                  </a:cxn>
+                  <a:cxn ang="0">
+                    <a:pos x="connsiteX17" y="connsiteY17"/>
+                  </a:cxn>
+                  <a:cxn ang="0">
+                    <a:pos x="connsiteX18" y="connsiteY18"/>
+                  </a:cxn>
+                  <a:cxn ang="0">
+                    <a:pos x="connsiteX19" y="connsiteY19"/>
+                  </a:cxn>
+                  <a:cxn ang="0">
+                    <a:pos x="connsiteX20" y="connsiteY20"/>
+                  </a:cxn>
+                </a:cxnLst>
+                <a:rect l="l" t="t" r="r" b="b"/>
+                <a:pathLst>
+                  <a:path w="801038" h="570598">
+                    <a:moveTo>
+                      <a:pt x="484955" y="0"/>
+                    </a:moveTo>
+                    <a:cubicBezTo>
+                      <a:pt x="614291" y="0"/>
+                      <a:pt x="719139" y="104848"/>
+                      <a:pt x="719139" y="234184"/>
+                    </a:cubicBezTo>
+                    <a:lnTo>
+                      <a:pt x="713016" y="264512"/>
+                    </a:lnTo>
+                    <a:lnTo>
+                      <a:pt x="750011" y="288196"/>
+                    </a:lnTo>
+                    <a:cubicBezTo>
+                      <a:pt x="781538" y="318133"/>
+                      <a:pt x="801038" y="359490"/>
+                      <a:pt x="801038" y="405171"/>
+                    </a:cubicBezTo>
+                    <a:cubicBezTo>
+                      <a:pt x="801038" y="473693"/>
+                      <a:pt x="757164" y="532485"/>
+                      <a:pt x="694635" y="557598"/>
+                    </a:cubicBezTo>
+                    <a:lnTo>
+                      <a:pt x="632231" y="569561"/>
+                    </a:lnTo>
+                    <a:lnTo>
+                      <a:pt x="632231" y="569790"/>
+                    </a:lnTo>
+                    <a:lnTo>
+                      <a:pt x="631037" y="569790"/>
+                    </a:lnTo>
+                    <a:lnTo>
+                      <a:pt x="626822" y="570598"/>
+                    </a:lnTo>
+                    <a:lnTo>
+                      <a:pt x="622607" y="569790"/>
+                    </a:lnTo>
+                    <a:lnTo>
+                      <a:pt x="178431" y="569790"/>
+                    </a:lnTo>
+                    <a:lnTo>
+                      <a:pt x="174216" y="570598"/>
+                    </a:lnTo>
+                    <a:cubicBezTo>
+                      <a:pt x="77999" y="570598"/>
+                      <a:pt x="0" y="496534"/>
+                      <a:pt x="0" y="405171"/>
+                    </a:cubicBezTo>
+                    <a:cubicBezTo>
+                      <a:pt x="0" y="336649"/>
+                      <a:pt x="43874" y="277857"/>
+                      <a:pt x="106403" y="252744"/>
+                    </a:cubicBezTo>
+                    <a:lnTo>
+                      <a:pt x="113189" y="251443"/>
+                    </a:lnTo>
+                    <a:lnTo>
+                      <a:pt x="114047" y="247193"/>
+                    </a:lnTo>
+                    <a:cubicBezTo>
+                      <a:pt x="134602" y="198594"/>
+                      <a:pt x="182725" y="164494"/>
+                      <a:pt x="238811" y="164494"/>
+                    </a:cubicBezTo>
+                    <a:lnTo>
+                      <a:pt x="261449" y="167916"/>
+                    </a:lnTo>
+                    <a:lnTo>
+                      <a:pt x="269174" y="143029"/>
+                    </a:lnTo>
+                    <a:cubicBezTo>
+                      <a:pt x="304726" y="58977"/>
+                      <a:pt x="387953" y="0"/>
+                      <a:pt x="484955" y="0"/>
+                    </a:cubicBezTo>
+                    <a:close/>
+                  </a:path>
+                </a:pathLst>
+              </a:custGeom>
+              <a:noFill/>
+              <a:ln w="12700">
+                <a:solidFill>
+                  <a:srgbClr val="FF5757"/>
+                </a:solidFill>
+              </a:ln>
+            </p:spPr>
+            <p:style>
+              <a:lnRef idx="2">
+                <a:schemeClr val="accent1">
+                  <a:shade val="50000"/>
+                </a:schemeClr>
+              </a:lnRef>
+              <a:fillRef idx="1">
+                <a:schemeClr val="accent1"/>
+              </a:fillRef>
+              <a:effectRef idx="0">
+                <a:schemeClr val="accent1"/>
+              </a:effectRef>
+              <a:fontRef idx="minor">
+                <a:schemeClr val="lt1"/>
+              </a:fontRef>
+            </p:style>
+            <p:txBody>
+              <a:bodyPr rtlCol="0" anchor="ctr"/>
+              <a:lstStyle/>
+              <a:p>
+                <a:pPr algn="ctr"/>
+                <a:endParaRPr lang="en-US"/>
+              </a:p>
+            </p:txBody>
+          </p:sp>
+          <p:sp>
+            <p:nvSpPr>
+              <p:cNvPr id="30" name="TextBox 29">
+                <a:extLst>
+                  <a:ext uri="{FF2B5EF4-FFF2-40B4-BE49-F238E27FC236}">
+                    <a16:creationId xmlns:a16="http://schemas.microsoft.com/office/drawing/2014/main" id="{365DFE3C-B656-8AAE-3ABA-CC539B572284}"/>
+                  </a:ext>
+                </a:extLst>
+              </p:cNvPr>
+              <p:cNvSpPr txBox="1"/>
+              <p:nvPr/>
+            </p:nvSpPr>
+            <p:spPr>
+              <a:xfrm>
+                <a:off x="406515" y="1233726"/>
+                <a:ext cx="1179854" cy="668691"/>
+              </a:xfrm>
+              <a:prstGeom prst="rect">
+                <a:avLst/>
+              </a:prstGeom>
+              <a:noFill/>
+            </p:spPr>
+            <p:txBody>
+              <a:bodyPr wrap="none" rtlCol="0">
+                <a:spAutoFit/>
+              </a:bodyPr>
+              <a:lstStyle/>
+              <a:p>
+                <a:r>
+                  <a:rPr lang="es-ES" sz="700" b="1" dirty="0">
+                    <a:solidFill>
+                      <a:srgbClr val="FF5757"/>
+                    </a:solidFill>
+                    <a:latin typeface="Arial" panose="020B0604020202020204" pitchFamily="34" charset="0"/>
+                    <a:cs typeface="Arial" panose="020B0604020202020204" pitchFamily="34" charset="0"/>
+                  </a:rPr>
+                  <a:t>CO</a:t>
+                </a:r>
+                <a:r>
+                  <a:rPr lang="es-ES" sz="700" b="1" baseline="-25000" dirty="0">
+                    <a:solidFill>
+                      <a:srgbClr val="FF5757"/>
+                    </a:solidFill>
+                    <a:latin typeface="Arial" panose="020B0604020202020204" pitchFamily="34" charset="0"/>
+                    <a:cs typeface="Arial" panose="020B0604020202020204" pitchFamily="34" charset="0"/>
+                  </a:rPr>
+                  <a:t>2</a:t>
+                </a:r>
+                <a:endParaRPr lang="en-US" sz="700" b="1" baseline="-25000" dirty="0">
+                  <a:solidFill>
+                    <a:srgbClr val="FF5757"/>
+                  </a:solidFill>
+                  <a:latin typeface="Arial" panose="020B0604020202020204" pitchFamily="34" charset="0"/>
+                  <a:cs typeface="Arial" panose="020B0604020202020204" pitchFamily="34" charset="0"/>
+                </a:endParaRPr>
+              </a:p>
+            </p:txBody>
+          </p:sp>
+        </p:grpSp>
+        <p:grpSp>
+          <p:nvGrpSpPr>
+            <p:cNvPr id="31" name="Group 30">
+              <a:extLst>
+                <a:ext uri="{FF2B5EF4-FFF2-40B4-BE49-F238E27FC236}">
+                  <a16:creationId xmlns:a16="http://schemas.microsoft.com/office/drawing/2014/main" id="{A14E454B-8329-AF95-00CD-4C3F1B6403BC}"/>
+                </a:ext>
+              </a:extLst>
+            </p:cNvPr>
+            <p:cNvGrpSpPr/>
+            <p:nvPr/>
+          </p:nvGrpSpPr>
+          <p:grpSpPr>
+            <a:xfrm>
+              <a:off x="2537855" y="168897"/>
+              <a:ext cx="352982" cy="203183"/>
+              <a:chOff x="400147" y="1223271"/>
+              <a:chExt cx="1179854" cy="679146"/>
+            </a:xfrm>
+          </p:grpSpPr>
+          <p:sp>
+            <p:nvSpPr>
+              <p:cNvPr id="32" name="Freeform 39">
+                <a:extLst>
+                  <a:ext uri="{FF2B5EF4-FFF2-40B4-BE49-F238E27FC236}">
+                    <a16:creationId xmlns:a16="http://schemas.microsoft.com/office/drawing/2014/main" id="{D3E860C6-6E40-6320-3CC5-9A2BDC147CB5}"/>
+                  </a:ext>
+                </a:extLst>
+              </p:cNvPr>
+              <p:cNvSpPr/>
+              <p:nvPr/>
+            </p:nvSpPr>
+            <p:spPr>
+              <a:xfrm>
+                <a:off x="561409" y="1223271"/>
+                <a:ext cx="801038" cy="570598"/>
+              </a:xfrm>
+              <a:custGeom>
+                <a:avLst/>
+                <a:gdLst>
+                  <a:gd name="connsiteX0" fmla="*/ 484955 w 801038"/>
+                  <a:gd name="connsiteY0" fmla="*/ 0 h 570598"/>
+                  <a:gd name="connsiteX1" fmla="*/ 719139 w 801038"/>
+                  <a:gd name="connsiteY1" fmla="*/ 234184 h 570598"/>
+                  <a:gd name="connsiteX2" fmla="*/ 713016 w 801038"/>
+                  <a:gd name="connsiteY2" fmla="*/ 264512 h 570598"/>
+                  <a:gd name="connsiteX3" fmla="*/ 750011 w 801038"/>
+                  <a:gd name="connsiteY3" fmla="*/ 288196 h 570598"/>
+                  <a:gd name="connsiteX4" fmla="*/ 801038 w 801038"/>
+                  <a:gd name="connsiteY4" fmla="*/ 405171 h 570598"/>
+                  <a:gd name="connsiteX5" fmla="*/ 694635 w 801038"/>
+                  <a:gd name="connsiteY5" fmla="*/ 557598 h 570598"/>
+                  <a:gd name="connsiteX6" fmla="*/ 632231 w 801038"/>
+                  <a:gd name="connsiteY6" fmla="*/ 569561 h 570598"/>
+                  <a:gd name="connsiteX7" fmla="*/ 632231 w 801038"/>
+                  <a:gd name="connsiteY7" fmla="*/ 569790 h 570598"/>
+                  <a:gd name="connsiteX8" fmla="*/ 631037 w 801038"/>
+                  <a:gd name="connsiteY8" fmla="*/ 569790 h 570598"/>
+                  <a:gd name="connsiteX9" fmla="*/ 626822 w 801038"/>
+                  <a:gd name="connsiteY9" fmla="*/ 570598 h 570598"/>
+                  <a:gd name="connsiteX10" fmla="*/ 622607 w 801038"/>
+                  <a:gd name="connsiteY10" fmla="*/ 569790 h 570598"/>
+                  <a:gd name="connsiteX11" fmla="*/ 178431 w 801038"/>
+                  <a:gd name="connsiteY11" fmla="*/ 569790 h 570598"/>
+                  <a:gd name="connsiteX12" fmla="*/ 174216 w 801038"/>
+                  <a:gd name="connsiteY12" fmla="*/ 570598 h 570598"/>
+                  <a:gd name="connsiteX13" fmla="*/ 0 w 801038"/>
+                  <a:gd name="connsiteY13" fmla="*/ 405171 h 570598"/>
+                  <a:gd name="connsiteX14" fmla="*/ 106403 w 801038"/>
+                  <a:gd name="connsiteY14" fmla="*/ 252744 h 570598"/>
+                  <a:gd name="connsiteX15" fmla="*/ 113189 w 801038"/>
+                  <a:gd name="connsiteY15" fmla="*/ 251443 h 570598"/>
+                  <a:gd name="connsiteX16" fmla="*/ 114047 w 801038"/>
+                  <a:gd name="connsiteY16" fmla="*/ 247193 h 570598"/>
+                  <a:gd name="connsiteX17" fmla="*/ 238811 w 801038"/>
+                  <a:gd name="connsiteY17" fmla="*/ 164494 h 570598"/>
+                  <a:gd name="connsiteX18" fmla="*/ 261449 w 801038"/>
+                  <a:gd name="connsiteY18" fmla="*/ 167916 h 570598"/>
+                  <a:gd name="connsiteX19" fmla="*/ 269174 w 801038"/>
+                  <a:gd name="connsiteY19" fmla="*/ 143029 h 570598"/>
+                  <a:gd name="connsiteX20" fmla="*/ 484955 w 801038"/>
+                  <a:gd name="connsiteY20" fmla="*/ 0 h 570598"/>
+                </a:gdLst>
+                <a:ahLst/>
+                <a:cxnLst>
+                  <a:cxn ang="0">
+                    <a:pos x="connsiteX0" y="connsiteY0"/>
+                  </a:cxn>
+                  <a:cxn ang="0">
+                    <a:pos x="connsiteX1" y="connsiteY1"/>
+                  </a:cxn>
+                  <a:cxn ang="0">
+                    <a:pos x="connsiteX2" y="connsiteY2"/>
+                  </a:cxn>
+                  <a:cxn ang="0">
+                    <a:pos x="connsiteX3" y="connsiteY3"/>
+                  </a:cxn>
+                  <a:cxn ang="0">
+                    <a:pos x="connsiteX4" y="connsiteY4"/>
+                  </a:cxn>
+                  <a:cxn ang="0">
+                    <a:pos x="connsiteX5" y="connsiteY5"/>
+                  </a:cxn>
+                  <a:cxn ang="0">
+                    <a:pos x="connsiteX6" y="connsiteY6"/>
+                  </a:cxn>
+                  <a:cxn ang="0">
+                    <a:pos x="connsiteX7" y="connsiteY7"/>
+                  </a:cxn>
+                  <a:cxn ang="0">
+                    <a:pos x="connsiteX8" y="connsiteY8"/>
+                  </a:cxn>
+                  <a:cxn ang="0">
+                    <a:pos x="connsiteX9" y="connsiteY9"/>
+                  </a:cxn>
+                  <a:cxn ang="0">
+                    <a:pos x="connsiteX10" y="connsiteY10"/>
+                  </a:cxn>
+                  <a:cxn ang="0">
+                    <a:pos x="connsiteX11" y="connsiteY11"/>
+                  </a:cxn>
+                  <a:cxn ang="0">
+                    <a:pos x="connsiteX12" y="connsiteY12"/>
+                  </a:cxn>
+                  <a:cxn ang="0">
+                    <a:pos x="connsiteX13" y="connsiteY13"/>
+                  </a:cxn>
+                  <a:cxn ang="0">
+                    <a:pos x="connsiteX14" y="connsiteY14"/>
+                  </a:cxn>
+                  <a:cxn ang="0">
+                    <a:pos x="connsiteX15" y="connsiteY15"/>
+                  </a:cxn>
+                  <a:cxn ang="0">
+                    <a:pos x="connsiteX16" y="connsiteY16"/>
+                  </a:cxn>
+                  <a:cxn ang="0">
+                    <a:pos x="connsiteX17" y="connsiteY17"/>
+                  </a:cxn>
+                  <a:cxn ang="0">
+                    <a:pos x="connsiteX18" y="connsiteY18"/>
+                  </a:cxn>
+                  <a:cxn ang="0">
+                    <a:pos x="connsiteX19" y="connsiteY19"/>
+                  </a:cxn>
+                  <a:cxn ang="0">
+                    <a:pos x="connsiteX20" y="connsiteY20"/>
+                  </a:cxn>
+                </a:cxnLst>
+                <a:rect l="l" t="t" r="r" b="b"/>
+                <a:pathLst>
+                  <a:path w="801038" h="570598">
+                    <a:moveTo>
+                      <a:pt x="484955" y="0"/>
+                    </a:moveTo>
+                    <a:cubicBezTo>
+                      <a:pt x="614291" y="0"/>
+                      <a:pt x="719139" y="104848"/>
+                      <a:pt x="719139" y="234184"/>
+                    </a:cubicBezTo>
+                    <a:lnTo>
+                      <a:pt x="713016" y="264512"/>
+                    </a:lnTo>
+                    <a:lnTo>
+                      <a:pt x="750011" y="288196"/>
+                    </a:lnTo>
+                    <a:cubicBezTo>
+                      <a:pt x="781538" y="318133"/>
+                      <a:pt x="801038" y="359490"/>
+                      <a:pt x="801038" y="405171"/>
+                    </a:cubicBezTo>
+                    <a:cubicBezTo>
+                      <a:pt x="801038" y="473693"/>
+                      <a:pt x="757164" y="532485"/>
+                      <a:pt x="694635" y="557598"/>
+                    </a:cubicBezTo>
+                    <a:lnTo>
+                      <a:pt x="632231" y="569561"/>
+                    </a:lnTo>
+                    <a:lnTo>
+                      <a:pt x="632231" y="569790"/>
+                    </a:lnTo>
+                    <a:lnTo>
+                      <a:pt x="631037" y="569790"/>
+                    </a:lnTo>
+                    <a:lnTo>
+                      <a:pt x="626822" y="570598"/>
+                    </a:lnTo>
+                    <a:lnTo>
+                      <a:pt x="622607" y="569790"/>
+                    </a:lnTo>
+                    <a:lnTo>
+                      <a:pt x="178431" y="569790"/>
+                    </a:lnTo>
+                    <a:lnTo>
+                      <a:pt x="174216" y="570598"/>
+                    </a:lnTo>
+                    <a:cubicBezTo>
+                      <a:pt x="77999" y="570598"/>
+                      <a:pt x="0" y="496534"/>
+                      <a:pt x="0" y="405171"/>
+                    </a:cubicBezTo>
+                    <a:cubicBezTo>
+                      <a:pt x="0" y="336649"/>
+                      <a:pt x="43874" y="277857"/>
+                      <a:pt x="106403" y="252744"/>
+                    </a:cubicBezTo>
+                    <a:lnTo>
+                      <a:pt x="113189" y="251443"/>
+                    </a:lnTo>
+                    <a:lnTo>
+                      <a:pt x="114047" y="247193"/>
+                    </a:lnTo>
+                    <a:cubicBezTo>
+                      <a:pt x="134602" y="198594"/>
+                      <a:pt x="182725" y="164494"/>
+                      <a:pt x="238811" y="164494"/>
+                    </a:cubicBezTo>
+                    <a:lnTo>
+                      <a:pt x="261449" y="167916"/>
+                    </a:lnTo>
+                    <a:lnTo>
+                      <a:pt x="269174" y="143029"/>
+                    </a:lnTo>
+                    <a:cubicBezTo>
+                      <a:pt x="304726" y="58977"/>
+                      <a:pt x="387953" y="0"/>
+                      <a:pt x="484955" y="0"/>
+                    </a:cubicBezTo>
+                    <a:close/>
+                  </a:path>
+                </a:pathLst>
+              </a:custGeom>
+              <a:noFill/>
+              <a:ln w="12700">
+                <a:solidFill>
+                  <a:srgbClr val="FF5757"/>
+                </a:solidFill>
+              </a:ln>
+            </p:spPr>
+            <p:style>
+              <a:lnRef idx="2">
+                <a:schemeClr val="accent1">
+                  <a:shade val="50000"/>
+                </a:schemeClr>
+              </a:lnRef>
+              <a:fillRef idx="1">
+                <a:schemeClr val="accent1"/>
+              </a:fillRef>
+              <a:effectRef idx="0">
+                <a:schemeClr val="accent1"/>
+              </a:effectRef>
+              <a:fontRef idx="minor">
+                <a:schemeClr val="lt1"/>
+              </a:fontRef>
+            </p:style>
+            <p:txBody>
+              <a:bodyPr rtlCol="0" anchor="ctr"/>
+              <a:lstStyle/>
+              <a:p>
+                <a:pPr algn="ctr"/>
+                <a:endParaRPr lang="en-US"/>
+              </a:p>
+            </p:txBody>
+          </p:sp>
+          <p:sp>
+            <p:nvSpPr>
+              <p:cNvPr id="33" name="TextBox 32">
+                <a:extLst>
+                  <a:ext uri="{FF2B5EF4-FFF2-40B4-BE49-F238E27FC236}">
+                    <a16:creationId xmlns:a16="http://schemas.microsoft.com/office/drawing/2014/main" id="{3BF821A0-85BF-6B75-724D-5D40D57A5F5B}"/>
+                  </a:ext>
+                </a:extLst>
+              </p:cNvPr>
+              <p:cNvSpPr txBox="1"/>
+              <p:nvPr/>
+            </p:nvSpPr>
+            <p:spPr>
+              <a:xfrm>
+                <a:off x="400147" y="1233726"/>
+                <a:ext cx="1179854" cy="668691"/>
+              </a:xfrm>
+              <a:prstGeom prst="rect">
+                <a:avLst/>
+              </a:prstGeom>
+              <a:noFill/>
+            </p:spPr>
+            <p:txBody>
+              <a:bodyPr wrap="none" rtlCol="0">
+                <a:spAutoFit/>
+              </a:bodyPr>
+              <a:lstStyle/>
+              <a:p>
+                <a:r>
+                  <a:rPr lang="es-ES" sz="700" b="1" dirty="0">
+                    <a:solidFill>
+                      <a:srgbClr val="FF5757"/>
+                    </a:solidFill>
+                    <a:latin typeface="Arial" panose="020B0604020202020204" pitchFamily="34" charset="0"/>
+                    <a:cs typeface="Arial" panose="020B0604020202020204" pitchFamily="34" charset="0"/>
+                  </a:rPr>
+                  <a:t>CO</a:t>
+                </a:r>
+                <a:r>
+                  <a:rPr lang="es-ES" sz="700" b="1" baseline="-25000" dirty="0">
+                    <a:solidFill>
+                      <a:srgbClr val="FF5757"/>
+                    </a:solidFill>
+                    <a:latin typeface="Arial" panose="020B0604020202020204" pitchFamily="34" charset="0"/>
+                    <a:cs typeface="Arial" panose="020B0604020202020204" pitchFamily="34" charset="0"/>
+                  </a:rPr>
+                  <a:t>2</a:t>
+                </a:r>
+                <a:endParaRPr lang="en-US" sz="700" b="1" baseline="-25000" dirty="0">
+                  <a:solidFill>
+                    <a:srgbClr val="FF5757"/>
+                  </a:solidFill>
+                  <a:latin typeface="Arial" panose="020B0604020202020204" pitchFamily="34" charset="0"/>
+                  <a:cs typeface="Arial" panose="020B0604020202020204" pitchFamily="34" charset="0"/>
+                </a:endParaRPr>
+              </a:p>
+            </p:txBody>
+          </p:sp>
+        </p:grpSp>
+        <p:grpSp>
+          <p:nvGrpSpPr>
+            <p:cNvPr id="19" name="Group 18">
+              <a:extLst>
+                <a:ext uri="{FF2B5EF4-FFF2-40B4-BE49-F238E27FC236}">
+                  <a16:creationId xmlns:a16="http://schemas.microsoft.com/office/drawing/2014/main" id="{7D702468-33C1-95B8-16A3-113E064F2CCD}"/>
+                </a:ext>
+              </a:extLst>
+            </p:cNvPr>
+            <p:cNvGrpSpPr/>
+            <p:nvPr/>
+          </p:nvGrpSpPr>
+          <p:grpSpPr>
+            <a:xfrm>
+              <a:off x="-22174" y="1100538"/>
+              <a:ext cx="383439" cy="357779"/>
+              <a:chOff x="2591" y="1089108"/>
+              <a:chExt cx="383439" cy="357779"/>
+            </a:xfrm>
+          </p:grpSpPr>
+          <p:sp>
+            <p:nvSpPr>
+              <p:cNvPr id="7" name="TextBox 6">
+                <a:extLst>
+                  <a:ext uri="{FF2B5EF4-FFF2-40B4-BE49-F238E27FC236}">
+                    <a16:creationId xmlns:a16="http://schemas.microsoft.com/office/drawing/2014/main" id="{7BA2EC7A-565B-58C7-4DFE-8816D578A418}"/>
+                  </a:ext>
+                </a:extLst>
+              </p:cNvPr>
+              <p:cNvSpPr txBox="1"/>
+              <p:nvPr/>
+            </p:nvSpPr>
+            <p:spPr>
+              <a:xfrm>
+                <a:off x="2591" y="1246832"/>
+                <a:ext cx="383439" cy="200055"/>
+              </a:xfrm>
+              <a:prstGeom prst="rect">
+                <a:avLst/>
+              </a:prstGeom>
+              <a:noFill/>
+            </p:spPr>
+            <p:txBody>
+              <a:bodyPr wrap="none" rtlCol="0">
+                <a:spAutoFit/>
+              </a:bodyPr>
+              <a:lstStyle/>
+              <a:p>
+                <a:pPr algn="ctr"/>
+                <a:r>
+                  <a:rPr lang="en-US" sz="700" dirty="0">
+                    <a:solidFill>
+                      <a:schemeClr val="tx1">
+                        <a:lumMod val="75000"/>
+                        <a:lumOff val="25000"/>
+                      </a:schemeClr>
+                    </a:solidFill>
+                    <a:latin typeface="Arial" panose="020B0604020202020204" pitchFamily="34" charset="0"/>
+                    <a:cs typeface="Arial" panose="020B0604020202020204" pitchFamily="34" charset="0"/>
+                  </a:rPr>
+                  <a:t>2020</a:t>
+                </a:r>
+              </a:p>
+            </p:txBody>
+          </p:sp>
+          <p:pic>
+            <p:nvPicPr>
+              <p:cNvPr id="41" name="Picture 40">
+                <a:extLst>
+                  <a:ext uri="{FF2B5EF4-FFF2-40B4-BE49-F238E27FC236}">
+                    <a16:creationId xmlns:a16="http://schemas.microsoft.com/office/drawing/2014/main" id="{324547CC-8E6A-5B13-60F0-01C2F296E069}"/>
+                  </a:ext>
+                </a:extLst>
+              </p:cNvPr>
+              <p:cNvPicPr>
+                <a:picLocks noChangeAspect="1"/>
+              </p:cNvPicPr>
+              <p:nvPr/>
+            </p:nvPicPr>
+            <p:blipFill>
+              <a:blip r:embed="rId3"/>
+              <a:stretch>
+                <a:fillRect/>
+              </a:stretch>
+            </p:blipFill>
+            <p:spPr>
+              <a:xfrm>
+                <a:off x="108343" y="1089108"/>
+                <a:ext cx="167003" cy="200055"/>
+              </a:xfrm>
+              <a:prstGeom prst="rect">
+                <a:avLst/>
+              </a:prstGeom>
+            </p:spPr>
+          </p:pic>
+        </p:grpSp>
         <p:sp>
           <p:nvSpPr>
-            <p:cNvPr id="13" name="TextBox 12">
+            <p:cNvPr id="42" name="TextBox 41">
               <a:extLst>
                 <a:ext uri="{FF2B5EF4-FFF2-40B4-BE49-F238E27FC236}">
-                  <a16:creationId xmlns:a16="http://schemas.microsoft.com/office/drawing/2014/main" id="{872A75E9-C305-157C-09A1-47A843DD1A3A}"/>
+                  <a16:creationId xmlns:a16="http://schemas.microsoft.com/office/drawing/2014/main" id="{6183D45F-7733-37DC-32D0-042025016995}"/>
                 </a:ext>
               </a:extLst>
             </p:cNvPr>
@@ -4757,8 +4606,8 @@
           </p:nvSpPr>
           <p:spPr>
             <a:xfrm>
-              <a:off x="1648650" y="1246832"/>
-              <a:ext cx="383439" cy="200055"/>
+              <a:off x="-10242" y="833075"/>
+              <a:ext cx="1553292" cy="200055"/>
             </a:xfrm>
             <a:prstGeom prst="rect">
               <a:avLst/>
@@ -4766,334 +4615,506 @@
             <a:noFill/>
           </p:spPr>
           <p:txBody>
-            <a:bodyPr wrap="none" rtlCol="0">
+            <a:bodyPr wrap="square" rtlCol="0">
               <a:spAutoFit/>
             </a:bodyPr>
-            <a:lstStyle/>
-            <a:p>
-              <a:pPr algn="ctr"/>
-              <a:r>
-                <a:rPr lang="en-US" sz="700" dirty="0">
+            <a:lstStyle>
+              <a:defPPr>
+                <a:defRPr lang="en-US"/>
+              </a:defPPr>
+              <a:lvl1pPr>
+                <a:defRPr spc="400">
                   <a:solidFill>
-                    <a:schemeClr val="tx1">
-                      <a:lumMod val="75000"/>
-                      <a:lumOff val="25000"/>
+                    <a:schemeClr val="accent6">
+                      <a:lumMod val="20000"/>
+                      <a:lumOff val="80000"/>
                     </a:schemeClr>
                   </a:solidFill>
                   <a:latin typeface="Arial" panose="020B0604020202020204" pitchFamily="34" charset="0"/>
                   <a:cs typeface="Arial" panose="020B0604020202020204" pitchFamily="34" charset="0"/>
+                </a:defRPr>
+              </a:lvl1pPr>
+            </a:lstStyle>
+            <a:p>
+              <a:r>
+                <a:rPr lang="en-US" sz="700" b="1" spc="200" dirty="0">
+                  <a:solidFill>
+                    <a:schemeClr val="tx1"/>
+                  </a:solidFill>
                 </a:rPr>
-                <a:t>2040</a:t>
+                <a:t>Climate policies</a:t>
               </a:r>
             </a:p>
           </p:txBody>
         </p:sp>
-        <p:pic>
-          <p:nvPicPr>
-            <p:cNvPr id="44" name="Picture 43">
+        <p:grpSp>
+          <p:nvGrpSpPr>
+            <p:cNvPr id="18" name="Group 17">
               <a:extLst>
                 <a:ext uri="{FF2B5EF4-FFF2-40B4-BE49-F238E27FC236}">
-                  <a16:creationId xmlns:a16="http://schemas.microsoft.com/office/drawing/2014/main" id="{D78B6E5D-0D50-EC3C-9437-C0465B82EFAB}"/>
+                  <a16:creationId xmlns:a16="http://schemas.microsoft.com/office/drawing/2014/main" id="{B64F5623-D164-6B54-95E9-3DCA208FCFF5}"/>
                 </a:ext>
               </a:extLst>
             </p:cNvPr>
-            <p:cNvPicPr>
-              <a:picLocks noChangeAspect="1"/>
-            </p:cNvPicPr>
+            <p:cNvGrpSpPr/>
             <p:nvPr/>
-          </p:nvPicPr>
-          <p:blipFill>
-            <a:blip r:embed="rId3"/>
-            <a:stretch>
-              <a:fillRect/>
-            </a:stretch>
-          </p:blipFill>
-          <p:spPr>
+          </p:nvGrpSpPr>
+          <p:grpSpPr>
             <a:xfrm>
-              <a:off x="1691925" y="942637"/>
-              <a:ext cx="289275" cy="346527"/>
+              <a:off x="808793" y="1023183"/>
+              <a:ext cx="383439" cy="435134"/>
+              <a:chOff x="841813" y="1011753"/>
+              <a:chExt cx="383439" cy="435134"/>
             </a:xfrm>
-            <a:prstGeom prst="rect">
-              <a:avLst/>
-            </a:prstGeom>
-          </p:spPr>
-        </p:pic>
-      </p:grpSp>
-      <p:grpSp>
-        <p:nvGrpSpPr>
-          <p:cNvPr id="16" name="Group 15">
-            <a:extLst>
-              <a:ext uri="{FF2B5EF4-FFF2-40B4-BE49-F238E27FC236}">
-                <a16:creationId xmlns:a16="http://schemas.microsoft.com/office/drawing/2014/main" id="{567CA5BA-AE34-8F31-3F63-3020DC6B4734}"/>
-              </a:ext>
-            </a:extLst>
-          </p:cNvPr>
-          <p:cNvGrpSpPr/>
-          <p:nvPr/>
-        </p:nvGrpSpPr>
-        <p:grpSpPr>
-          <a:xfrm>
-            <a:off x="2470727" y="878582"/>
-            <a:ext cx="383439" cy="579735"/>
-            <a:chOff x="2495492" y="867152"/>
-            <a:chExt cx="383439" cy="579735"/>
-          </a:xfrm>
-        </p:grpSpPr>
-        <p:sp>
-          <p:nvSpPr>
-            <p:cNvPr id="15" name="TextBox 14">
+          </p:grpSpPr>
+          <p:sp>
+            <p:nvSpPr>
+              <p:cNvPr id="9" name="TextBox 8">
+                <a:extLst>
+                  <a:ext uri="{FF2B5EF4-FFF2-40B4-BE49-F238E27FC236}">
+                    <a16:creationId xmlns:a16="http://schemas.microsoft.com/office/drawing/2014/main" id="{0E788515-4C07-9999-81E3-35871F31D652}"/>
+                  </a:ext>
+                </a:extLst>
+              </p:cNvPr>
+              <p:cNvSpPr txBox="1"/>
+              <p:nvPr/>
+            </p:nvSpPr>
+            <p:spPr>
+              <a:xfrm>
+                <a:off x="841813" y="1246832"/>
+                <a:ext cx="383439" cy="200055"/>
+              </a:xfrm>
+              <a:prstGeom prst="rect">
+                <a:avLst/>
+              </a:prstGeom>
+              <a:noFill/>
+            </p:spPr>
+            <p:txBody>
+              <a:bodyPr wrap="none" rtlCol="0">
+                <a:spAutoFit/>
+              </a:bodyPr>
+              <a:lstStyle/>
+              <a:p>
+                <a:pPr algn="ctr"/>
+                <a:r>
+                  <a:rPr lang="en-US" sz="700" dirty="0">
+                    <a:solidFill>
+                      <a:schemeClr val="tx1">
+                        <a:lumMod val="75000"/>
+                        <a:lumOff val="25000"/>
+                      </a:schemeClr>
+                    </a:solidFill>
+                    <a:latin typeface="Arial" panose="020B0604020202020204" pitchFamily="34" charset="0"/>
+                    <a:cs typeface="Arial" panose="020B0604020202020204" pitchFamily="34" charset="0"/>
+                  </a:rPr>
+                  <a:t>2030</a:t>
+                </a:r>
+              </a:p>
+            </p:txBody>
+          </p:sp>
+          <p:pic>
+            <p:nvPicPr>
+              <p:cNvPr id="43" name="Picture 42">
+                <a:extLst>
+                  <a:ext uri="{FF2B5EF4-FFF2-40B4-BE49-F238E27FC236}">
+                    <a16:creationId xmlns:a16="http://schemas.microsoft.com/office/drawing/2014/main" id="{4133AD86-8F1A-947C-3F22-C488359FDF67}"/>
+                  </a:ext>
+                </a:extLst>
+              </p:cNvPr>
+              <p:cNvPicPr>
+                <a:picLocks noChangeAspect="1"/>
+              </p:cNvPicPr>
+              <p:nvPr/>
+            </p:nvPicPr>
+            <p:blipFill>
+              <a:blip r:embed="rId3"/>
+              <a:stretch>
+                <a:fillRect/>
+              </a:stretch>
+            </p:blipFill>
+            <p:spPr>
+              <a:xfrm>
+                <a:off x="917085" y="1011753"/>
+                <a:ext cx="231578" cy="277411"/>
+              </a:xfrm>
+              <a:prstGeom prst="rect">
+                <a:avLst/>
+              </a:prstGeom>
+            </p:spPr>
+          </p:pic>
+        </p:grpSp>
+        <p:grpSp>
+          <p:nvGrpSpPr>
+            <p:cNvPr id="17" name="Group 16">
               <a:extLst>
                 <a:ext uri="{FF2B5EF4-FFF2-40B4-BE49-F238E27FC236}">
-                  <a16:creationId xmlns:a16="http://schemas.microsoft.com/office/drawing/2014/main" id="{1EAA5B8A-6F79-A40B-3576-8FC5049B5E53}"/>
+                  <a16:creationId xmlns:a16="http://schemas.microsoft.com/office/drawing/2014/main" id="{DFE7F8B3-0DD7-1CEC-2521-426F3748106B}"/>
                 </a:ext>
               </a:extLst>
             </p:cNvPr>
-            <p:cNvSpPr txBox="1"/>
+            <p:cNvGrpSpPr/>
             <p:nvPr/>
-          </p:nvSpPr>
-          <p:spPr>
+          </p:nvGrpSpPr>
+          <p:grpSpPr>
             <a:xfrm>
-              <a:off x="2495492" y="1246832"/>
-              <a:ext cx="383439" cy="200055"/>
+              <a:off x="1639760" y="954067"/>
+              <a:ext cx="383439" cy="504250"/>
+              <a:chOff x="1648650" y="942637"/>
+              <a:chExt cx="383439" cy="504250"/>
             </a:xfrm>
-            <a:prstGeom prst="rect">
-              <a:avLst/>
-            </a:prstGeom>
-            <a:noFill/>
-          </p:spPr>
-          <p:txBody>
-            <a:bodyPr wrap="none" rtlCol="0">
-              <a:spAutoFit/>
-            </a:bodyPr>
-            <a:lstStyle/>
-            <a:p>
-              <a:pPr algn="ctr"/>
-              <a:r>
-                <a:rPr lang="en-US" sz="700" dirty="0">
-                  <a:solidFill>
-                    <a:schemeClr val="tx1">
-                      <a:lumMod val="75000"/>
-                      <a:lumOff val="25000"/>
-                    </a:schemeClr>
-                  </a:solidFill>
-                  <a:latin typeface="Arial" panose="020B0604020202020204" pitchFamily="34" charset="0"/>
-                  <a:cs typeface="Arial" panose="020B0604020202020204" pitchFamily="34" charset="0"/>
-                </a:rPr>
-                <a:t>2050</a:t>
-              </a:r>
-            </a:p>
-          </p:txBody>
-        </p:sp>
-        <p:pic>
-          <p:nvPicPr>
-            <p:cNvPr id="45" name="Picture 44">
+          </p:grpSpPr>
+          <p:sp>
+            <p:nvSpPr>
+              <p:cNvPr id="13" name="TextBox 12">
+                <a:extLst>
+                  <a:ext uri="{FF2B5EF4-FFF2-40B4-BE49-F238E27FC236}">
+                    <a16:creationId xmlns:a16="http://schemas.microsoft.com/office/drawing/2014/main" id="{872A75E9-C305-157C-09A1-47A843DD1A3A}"/>
+                  </a:ext>
+                </a:extLst>
+              </p:cNvPr>
+              <p:cNvSpPr txBox="1"/>
+              <p:nvPr/>
+            </p:nvSpPr>
+            <p:spPr>
+              <a:xfrm>
+                <a:off x="1648650" y="1246832"/>
+                <a:ext cx="383439" cy="200055"/>
+              </a:xfrm>
+              <a:prstGeom prst="rect">
+                <a:avLst/>
+              </a:prstGeom>
+              <a:noFill/>
+            </p:spPr>
+            <p:txBody>
+              <a:bodyPr wrap="none" rtlCol="0">
+                <a:spAutoFit/>
+              </a:bodyPr>
+              <a:lstStyle/>
+              <a:p>
+                <a:pPr algn="ctr"/>
+                <a:r>
+                  <a:rPr lang="en-US" sz="700" dirty="0">
+                    <a:solidFill>
+                      <a:schemeClr val="tx1">
+                        <a:lumMod val="75000"/>
+                        <a:lumOff val="25000"/>
+                      </a:schemeClr>
+                    </a:solidFill>
+                    <a:latin typeface="Arial" panose="020B0604020202020204" pitchFamily="34" charset="0"/>
+                    <a:cs typeface="Arial" panose="020B0604020202020204" pitchFamily="34" charset="0"/>
+                  </a:rPr>
+                  <a:t>2040</a:t>
+                </a:r>
+              </a:p>
+            </p:txBody>
+          </p:sp>
+          <p:pic>
+            <p:nvPicPr>
+              <p:cNvPr id="44" name="Picture 43">
+                <a:extLst>
+                  <a:ext uri="{FF2B5EF4-FFF2-40B4-BE49-F238E27FC236}">
+                    <a16:creationId xmlns:a16="http://schemas.microsoft.com/office/drawing/2014/main" id="{D78B6E5D-0D50-EC3C-9437-C0465B82EFAB}"/>
+                  </a:ext>
+                </a:extLst>
+              </p:cNvPr>
+              <p:cNvPicPr>
+                <a:picLocks noChangeAspect="1"/>
+              </p:cNvPicPr>
+              <p:nvPr/>
+            </p:nvPicPr>
+            <p:blipFill>
+              <a:blip r:embed="rId3"/>
+              <a:stretch>
+                <a:fillRect/>
+              </a:stretch>
+            </p:blipFill>
+            <p:spPr>
+              <a:xfrm>
+                <a:off x="1691925" y="942637"/>
+                <a:ext cx="289275" cy="346527"/>
+              </a:xfrm>
+              <a:prstGeom prst="rect">
+                <a:avLst/>
+              </a:prstGeom>
+            </p:spPr>
+          </p:pic>
+        </p:grpSp>
+        <p:grpSp>
+          <p:nvGrpSpPr>
+            <p:cNvPr id="16" name="Group 15">
               <a:extLst>
                 <a:ext uri="{FF2B5EF4-FFF2-40B4-BE49-F238E27FC236}">
-                  <a16:creationId xmlns:a16="http://schemas.microsoft.com/office/drawing/2014/main" id="{7C1532A5-FF51-0795-571E-DE22C9000DB5}"/>
+                  <a16:creationId xmlns:a16="http://schemas.microsoft.com/office/drawing/2014/main" id="{567CA5BA-AE34-8F31-3F63-3020DC6B4734}"/>
                 </a:ext>
               </a:extLst>
             </p:cNvPr>
-            <p:cNvPicPr>
-              <a:picLocks noChangeAspect="1"/>
-            </p:cNvPicPr>
+            <p:cNvGrpSpPr/>
             <p:nvPr/>
-          </p:nvPicPr>
-          <p:blipFill>
-            <a:blip r:embed="rId3"/>
-            <a:stretch>
-              <a:fillRect/>
-            </a:stretch>
-          </p:blipFill>
+          </p:nvGrpSpPr>
+          <p:grpSpPr>
+            <a:xfrm>
+              <a:off x="2470727" y="878582"/>
+              <a:ext cx="383439" cy="579735"/>
+              <a:chOff x="2495492" y="867152"/>
+              <a:chExt cx="383439" cy="579735"/>
+            </a:xfrm>
+          </p:grpSpPr>
+          <p:sp>
+            <p:nvSpPr>
+              <p:cNvPr id="15" name="TextBox 14">
+                <a:extLst>
+                  <a:ext uri="{FF2B5EF4-FFF2-40B4-BE49-F238E27FC236}">
+                    <a16:creationId xmlns:a16="http://schemas.microsoft.com/office/drawing/2014/main" id="{1EAA5B8A-6F79-A40B-3576-8FC5049B5E53}"/>
+                  </a:ext>
+                </a:extLst>
+              </p:cNvPr>
+              <p:cNvSpPr txBox="1"/>
+              <p:nvPr/>
+            </p:nvSpPr>
+            <p:spPr>
+              <a:xfrm>
+                <a:off x="2495492" y="1246832"/>
+                <a:ext cx="383439" cy="200055"/>
+              </a:xfrm>
+              <a:prstGeom prst="rect">
+                <a:avLst/>
+              </a:prstGeom>
+              <a:noFill/>
+            </p:spPr>
+            <p:txBody>
+              <a:bodyPr wrap="none" rtlCol="0">
+                <a:spAutoFit/>
+              </a:bodyPr>
+              <a:lstStyle/>
+              <a:p>
+                <a:pPr algn="ctr"/>
+                <a:r>
+                  <a:rPr lang="en-US" sz="700" dirty="0">
+                    <a:solidFill>
+                      <a:schemeClr val="tx1">
+                        <a:lumMod val="75000"/>
+                        <a:lumOff val="25000"/>
+                      </a:schemeClr>
+                    </a:solidFill>
+                    <a:latin typeface="Arial" panose="020B0604020202020204" pitchFamily="34" charset="0"/>
+                    <a:cs typeface="Arial" panose="020B0604020202020204" pitchFamily="34" charset="0"/>
+                  </a:rPr>
+                  <a:t>2050</a:t>
+                </a:r>
+              </a:p>
+            </p:txBody>
+          </p:sp>
+          <p:pic>
+            <p:nvPicPr>
+              <p:cNvPr id="45" name="Picture 44">
+                <a:extLst>
+                  <a:ext uri="{FF2B5EF4-FFF2-40B4-BE49-F238E27FC236}">
+                    <a16:creationId xmlns:a16="http://schemas.microsoft.com/office/drawing/2014/main" id="{7C1532A5-FF51-0795-571E-DE22C9000DB5}"/>
+                  </a:ext>
+                </a:extLst>
+              </p:cNvPr>
+              <p:cNvPicPr>
+                <a:picLocks noChangeAspect="1"/>
+              </p:cNvPicPr>
+              <p:nvPr/>
+            </p:nvPicPr>
+            <p:blipFill>
+              <a:blip r:embed="rId3"/>
+              <a:stretch>
+                <a:fillRect/>
+              </a:stretch>
+            </p:blipFill>
+            <p:spPr>
+              <a:xfrm>
+                <a:off x="2504302" y="867152"/>
+                <a:ext cx="352289" cy="422012"/>
+              </a:xfrm>
+              <a:prstGeom prst="rect">
+                <a:avLst/>
+              </a:prstGeom>
+            </p:spPr>
+          </p:pic>
+        </p:grpSp>
+        <p:cxnSp>
+          <p:nvCxnSpPr>
+            <p:cNvPr id="5" name="Straight Arrow Connector 4">
+              <a:extLst>
+                <a:ext uri="{FF2B5EF4-FFF2-40B4-BE49-F238E27FC236}">
+                  <a16:creationId xmlns:a16="http://schemas.microsoft.com/office/drawing/2014/main" id="{B8A7CAE8-F7B9-1D0B-5541-CD486EB780C4}"/>
+                </a:ext>
+              </a:extLst>
+            </p:cNvPr>
+            <p:cNvCxnSpPr>
+              <a:cxnSpLocks/>
+            </p:cNvCxnSpPr>
+            <p:nvPr/>
+          </p:nvCxnSpPr>
           <p:spPr>
             <a:xfrm>
-              <a:off x="2504302" y="867152"/>
-              <a:ext cx="352289" cy="422012"/>
+              <a:off x="93345" y="665094"/>
+              <a:ext cx="1992630" cy="0"/>
             </a:xfrm>
-            <a:prstGeom prst="rect">
+            <a:prstGeom prst="straightConnector1">
               <a:avLst/>
             </a:prstGeom>
+            <a:ln cap="rnd">
+              <a:solidFill>
+                <a:schemeClr val="bg2"/>
+              </a:solidFill>
+              <a:tailEnd type="triangle"/>
+            </a:ln>
           </p:spPr>
-        </p:pic>
+          <p:style>
+            <a:lnRef idx="2">
+              <a:schemeClr val="accent1"/>
+            </a:lnRef>
+            <a:fillRef idx="0">
+              <a:schemeClr val="accent1"/>
+            </a:fillRef>
+            <a:effectRef idx="1">
+              <a:schemeClr val="accent1"/>
+            </a:effectRef>
+            <a:fontRef idx="minor">
+              <a:schemeClr val="tx1"/>
+            </a:fontRef>
+          </p:style>
+        </p:cxnSp>
+        <p:cxnSp>
+          <p:nvCxnSpPr>
+            <p:cNvPr id="24" name="Straight Connector 23">
+              <a:extLst>
+                <a:ext uri="{FF2B5EF4-FFF2-40B4-BE49-F238E27FC236}">
+                  <a16:creationId xmlns:a16="http://schemas.microsoft.com/office/drawing/2014/main" id="{C5CB3EC7-2ECD-AB65-81AA-FDFEDC5933FA}"/>
+                </a:ext>
+              </a:extLst>
+            </p:cNvPr>
+            <p:cNvCxnSpPr>
+              <a:stCxn id="7" idx="3"/>
+              <a:endCxn id="9" idx="1"/>
+            </p:cNvCxnSpPr>
+            <p:nvPr/>
+          </p:nvCxnSpPr>
+          <p:spPr>
+            <a:xfrm>
+              <a:off x="361265" y="1358290"/>
+              <a:ext cx="447528" cy="0"/>
+            </a:xfrm>
+            <a:prstGeom prst="line">
+              <a:avLst/>
+            </a:prstGeom>
+            <a:ln w="15875" cap="rnd">
+              <a:solidFill>
+                <a:schemeClr val="tx1"/>
+              </a:solidFill>
+            </a:ln>
+          </p:spPr>
+          <p:style>
+            <a:lnRef idx="2">
+              <a:schemeClr val="accent1"/>
+            </a:lnRef>
+            <a:fillRef idx="0">
+              <a:schemeClr val="accent1"/>
+            </a:fillRef>
+            <a:effectRef idx="1">
+              <a:schemeClr val="accent1"/>
+            </a:effectRef>
+            <a:fontRef idx="minor">
+              <a:schemeClr val="tx1"/>
+            </a:fontRef>
+          </p:style>
+        </p:cxnSp>
+        <p:cxnSp>
+          <p:nvCxnSpPr>
+            <p:cNvPr id="25" name="Straight Connector 24">
+              <a:extLst>
+                <a:ext uri="{FF2B5EF4-FFF2-40B4-BE49-F238E27FC236}">
+                  <a16:creationId xmlns:a16="http://schemas.microsoft.com/office/drawing/2014/main" id="{668900EC-8A92-1A91-C1F8-FFE44BAB1224}"/>
+                </a:ext>
+              </a:extLst>
+            </p:cNvPr>
+            <p:cNvCxnSpPr>
+              <a:cxnSpLocks/>
+              <a:stCxn id="9" idx="3"/>
+              <a:endCxn id="13" idx="1"/>
+            </p:cNvCxnSpPr>
+            <p:nvPr/>
+          </p:nvCxnSpPr>
+          <p:spPr>
+            <a:xfrm>
+              <a:off x="1192232" y="1358290"/>
+              <a:ext cx="447528" cy="0"/>
+            </a:xfrm>
+            <a:prstGeom prst="line">
+              <a:avLst/>
+            </a:prstGeom>
+            <a:ln w="15875" cap="rnd">
+              <a:solidFill>
+                <a:schemeClr val="tx1"/>
+              </a:solidFill>
+            </a:ln>
+          </p:spPr>
+          <p:style>
+            <a:lnRef idx="2">
+              <a:schemeClr val="accent1"/>
+            </a:lnRef>
+            <a:fillRef idx="0">
+              <a:schemeClr val="accent1"/>
+            </a:fillRef>
+            <a:effectRef idx="1">
+              <a:schemeClr val="accent1"/>
+            </a:effectRef>
+            <a:fontRef idx="minor">
+              <a:schemeClr val="tx1"/>
+            </a:fontRef>
+          </p:style>
+        </p:cxnSp>
+        <p:cxnSp>
+          <p:nvCxnSpPr>
+            <p:cNvPr id="34" name="Straight Connector 33">
+              <a:extLst>
+                <a:ext uri="{FF2B5EF4-FFF2-40B4-BE49-F238E27FC236}">
+                  <a16:creationId xmlns:a16="http://schemas.microsoft.com/office/drawing/2014/main" id="{3441C938-ACAB-D52F-8CEB-3CCF8D2AF48B}"/>
+                </a:ext>
+              </a:extLst>
+            </p:cNvPr>
+            <p:cNvCxnSpPr>
+              <a:cxnSpLocks/>
+              <a:stCxn id="13" idx="3"/>
+              <a:endCxn id="15" idx="1"/>
+            </p:cNvCxnSpPr>
+            <p:nvPr/>
+          </p:nvCxnSpPr>
+          <p:spPr>
+            <a:xfrm>
+              <a:off x="2023199" y="1358290"/>
+              <a:ext cx="447528" cy="0"/>
+            </a:xfrm>
+            <a:prstGeom prst="line">
+              <a:avLst/>
+            </a:prstGeom>
+            <a:ln w="15875" cap="rnd">
+              <a:solidFill>
+                <a:schemeClr val="tx1"/>
+              </a:solidFill>
+              <a:tailEnd type="triangle" w="sm" len="sm"/>
+            </a:ln>
+          </p:spPr>
+          <p:style>
+            <a:lnRef idx="2">
+              <a:schemeClr val="accent1"/>
+            </a:lnRef>
+            <a:fillRef idx="0">
+              <a:schemeClr val="accent1"/>
+            </a:fillRef>
+            <a:effectRef idx="1">
+              <a:schemeClr val="accent1"/>
+            </a:effectRef>
+            <a:fontRef idx="minor">
+              <a:schemeClr val="tx1"/>
+            </a:fontRef>
+          </p:style>
+        </p:cxnSp>
       </p:grpSp>
-      <p:cxnSp>
-        <p:nvCxnSpPr>
-          <p:cNvPr id="5" name="Straight Arrow Connector 4">
-            <a:extLst>
-              <a:ext uri="{FF2B5EF4-FFF2-40B4-BE49-F238E27FC236}">
-                <a16:creationId xmlns:a16="http://schemas.microsoft.com/office/drawing/2014/main" id="{B8A7CAE8-F7B9-1D0B-5541-CD486EB780C4}"/>
-              </a:ext>
-            </a:extLst>
-          </p:cNvPr>
-          <p:cNvCxnSpPr>
-            <a:cxnSpLocks/>
-          </p:cNvCxnSpPr>
-          <p:nvPr/>
-        </p:nvCxnSpPr>
-        <p:spPr>
-          <a:xfrm>
-            <a:off x="93345" y="665094"/>
-            <a:ext cx="1992630" cy="0"/>
-          </a:xfrm>
-          <a:prstGeom prst="straightConnector1">
-            <a:avLst/>
-          </a:prstGeom>
-          <a:ln cap="rnd">
-            <a:solidFill>
-              <a:schemeClr val="bg2"/>
-            </a:solidFill>
-            <a:tailEnd type="triangle"/>
-          </a:ln>
-        </p:spPr>
-        <p:style>
-          <a:lnRef idx="2">
-            <a:schemeClr val="accent1"/>
-          </a:lnRef>
-          <a:fillRef idx="0">
-            <a:schemeClr val="accent1"/>
-          </a:fillRef>
-          <a:effectRef idx="1">
-            <a:schemeClr val="accent1"/>
-          </a:effectRef>
-          <a:fontRef idx="minor">
-            <a:schemeClr val="tx1"/>
-          </a:fontRef>
-        </p:style>
-      </p:cxnSp>
-      <p:cxnSp>
-        <p:nvCxnSpPr>
-          <p:cNvPr id="24" name="Straight Connector 23">
-            <a:extLst>
-              <a:ext uri="{FF2B5EF4-FFF2-40B4-BE49-F238E27FC236}">
-                <a16:creationId xmlns:a16="http://schemas.microsoft.com/office/drawing/2014/main" id="{C5CB3EC7-2ECD-AB65-81AA-FDFEDC5933FA}"/>
-              </a:ext>
-            </a:extLst>
-          </p:cNvPr>
-          <p:cNvCxnSpPr>
-            <a:stCxn id="7" idx="3"/>
-            <a:endCxn id="9" idx="1"/>
-          </p:cNvCxnSpPr>
-          <p:nvPr/>
-        </p:nvCxnSpPr>
-        <p:spPr>
-          <a:xfrm>
-            <a:off x="361265" y="1358290"/>
-            <a:ext cx="447528" cy="0"/>
-          </a:xfrm>
-          <a:prstGeom prst="line">
-            <a:avLst/>
-          </a:prstGeom>
-          <a:ln w="15875" cap="rnd">
-            <a:solidFill>
-              <a:schemeClr val="tx1"/>
-            </a:solidFill>
-          </a:ln>
-        </p:spPr>
-        <p:style>
-          <a:lnRef idx="2">
-            <a:schemeClr val="accent1"/>
-          </a:lnRef>
-          <a:fillRef idx="0">
-            <a:schemeClr val="accent1"/>
-          </a:fillRef>
-          <a:effectRef idx="1">
-            <a:schemeClr val="accent1"/>
-          </a:effectRef>
-          <a:fontRef idx="minor">
-            <a:schemeClr val="tx1"/>
-          </a:fontRef>
-        </p:style>
-      </p:cxnSp>
-      <p:cxnSp>
-        <p:nvCxnSpPr>
-          <p:cNvPr id="25" name="Straight Connector 24">
-            <a:extLst>
-              <a:ext uri="{FF2B5EF4-FFF2-40B4-BE49-F238E27FC236}">
-                <a16:creationId xmlns:a16="http://schemas.microsoft.com/office/drawing/2014/main" id="{668900EC-8A92-1A91-C1F8-FFE44BAB1224}"/>
-              </a:ext>
-            </a:extLst>
-          </p:cNvPr>
-          <p:cNvCxnSpPr>
-            <a:cxnSpLocks/>
-            <a:stCxn id="9" idx="3"/>
-            <a:endCxn id="13" idx="1"/>
-          </p:cNvCxnSpPr>
-          <p:nvPr/>
-        </p:nvCxnSpPr>
-        <p:spPr>
-          <a:xfrm>
-            <a:off x="1192232" y="1358290"/>
-            <a:ext cx="447528" cy="0"/>
-          </a:xfrm>
-          <a:prstGeom prst="line">
-            <a:avLst/>
-          </a:prstGeom>
-          <a:ln w="15875" cap="rnd">
-            <a:solidFill>
-              <a:schemeClr val="tx1"/>
-            </a:solidFill>
-          </a:ln>
-        </p:spPr>
-        <p:style>
-          <a:lnRef idx="2">
-            <a:schemeClr val="accent1"/>
-          </a:lnRef>
-          <a:fillRef idx="0">
-            <a:schemeClr val="accent1"/>
-          </a:fillRef>
-          <a:effectRef idx="1">
-            <a:schemeClr val="accent1"/>
-          </a:effectRef>
-          <a:fontRef idx="minor">
-            <a:schemeClr val="tx1"/>
-          </a:fontRef>
-        </p:style>
-      </p:cxnSp>
-      <p:cxnSp>
-        <p:nvCxnSpPr>
-          <p:cNvPr id="34" name="Straight Connector 33">
-            <a:extLst>
-              <a:ext uri="{FF2B5EF4-FFF2-40B4-BE49-F238E27FC236}">
-                <a16:creationId xmlns:a16="http://schemas.microsoft.com/office/drawing/2014/main" id="{3441C938-ACAB-D52F-8CEB-3CCF8D2AF48B}"/>
-              </a:ext>
-            </a:extLst>
-          </p:cNvPr>
-          <p:cNvCxnSpPr>
-            <a:cxnSpLocks/>
-            <a:stCxn id="13" idx="3"/>
-            <a:endCxn id="15" idx="1"/>
-          </p:cNvCxnSpPr>
-          <p:nvPr/>
-        </p:nvCxnSpPr>
-        <p:spPr>
-          <a:xfrm>
-            <a:off x="2023199" y="1358290"/>
-            <a:ext cx="447528" cy="0"/>
-          </a:xfrm>
-          <a:prstGeom prst="line">
-            <a:avLst/>
-          </a:prstGeom>
-          <a:ln w="15875" cap="rnd">
-            <a:solidFill>
-              <a:schemeClr val="tx1"/>
-            </a:solidFill>
-            <a:tailEnd type="triangle" w="sm" len="sm"/>
-          </a:ln>
-        </p:spPr>
-        <p:style>
-          <a:lnRef idx="2">
-            <a:schemeClr val="accent1"/>
-          </a:lnRef>
-          <a:fillRef idx="0">
-            <a:schemeClr val="accent1"/>
-          </a:fillRef>
-          <a:effectRef idx="1">
-            <a:schemeClr val="accent1"/>
-          </a:effectRef>
-          <a:fontRef idx="minor">
-            <a:schemeClr val="tx1"/>
-          </a:fontRef>
-        </p:style>
-      </p:cxnSp>
     </p:spTree>
     <p:extLst>
       <p:ext uri="{BB962C8B-B14F-4D97-AF65-F5344CB8AC3E}">
